--- a/docs/pptx/entire/ritu-entire-linsubhr-sens-throm3.pptx
+++ b/docs/pptx/entire/ritu-entire-linsubhr-sens-throm3.pptx
@@ -3046,599 +3046,599 @@
           <p:spPr>
             <a:xfrm>
               <a:off x="1172049" y="2073503"/>
-              <a:ext cx="7090630" cy="3387435"/>
+              <a:ext cx="7090630" cy="3388167"/>
             </a:xfrm>
             <a:custGeom>
               <a:avLst/>
               <a:pathLst>
-                <a:path w="7090630" h="3387435">
+                <a:path w="7090630" h="3388167">
                   <a:moveTo>
-                    <a:pt x="330494" y="0"/>
+                    <a:pt x="339967" y="0"/>
                   </a:moveTo>
                   <a:lnTo>
-                    <a:pt x="358112" y="51284"/>
-                  </a:lnTo>
-                  <a:lnTo>
-                    <a:pt x="429735" y="179322"/>
-                  </a:lnTo>
-                  <a:lnTo>
-                    <a:pt x="501357" y="302583"/>
-                  </a:lnTo>
-                  <a:lnTo>
-                    <a:pt x="572980" y="421246"/>
-                  </a:lnTo>
-                  <a:lnTo>
-                    <a:pt x="644602" y="535484"/>
-                  </a:lnTo>
-                  <a:lnTo>
-                    <a:pt x="716225" y="645459"/>
-                  </a:lnTo>
-                  <a:lnTo>
-                    <a:pt x="787847" y="751333"/>
-                  </a:lnTo>
-                  <a:lnTo>
-                    <a:pt x="859470" y="853257"/>
-                  </a:lnTo>
-                  <a:lnTo>
-                    <a:pt x="931092" y="951379"/>
-                  </a:lnTo>
-                  <a:lnTo>
-                    <a:pt x="1002715" y="1045842"/>
-                  </a:lnTo>
-                  <a:lnTo>
-                    <a:pt x="1074337" y="1136780"/>
-                  </a:lnTo>
-                  <a:lnTo>
-                    <a:pt x="1145960" y="1224326"/>
-                  </a:lnTo>
-                  <a:lnTo>
-                    <a:pt x="1217582" y="1308607"/>
-                  </a:lnTo>
-                  <a:lnTo>
-                    <a:pt x="1289205" y="1389744"/>
-                  </a:lnTo>
-                  <a:lnTo>
-                    <a:pt x="1360827" y="1467854"/>
-                  </a:lnTo>
-                  <a:lnTo>
-                    <a:pt x="1432450" y="1543051"/>
-                  </a:lnTo>
-                  <a:lnTo>
-                    <a:pt x="1504073" y="1615442"/>
-                  </a:lnTo>
-                  <a:lnTo>
-                    <a:pt x="1575695" y="1685134"/>
-                  </a:lnTo>
-                  <a:lnTo>
-                    <a:pt x="1647318" y="1752225"/>
-                  </a:lnTo>
-                  <a:lnTo>
-                    <a:pt x="1718940" y="1816814"/>
-                  </a:lnTo>
-                  <a:lnTo>
-                    <a:pt x="1790563" y="1878994"/>
-                  </a:lnTo>
-                  <a:lnTo>
-                    <a:pt x="1862185" y="1938854"/>
-                  </a:lnTo>
-                  <a:lnTo>
-                    <a:pt x="1933808" y="1996482"/>
-                  </a:lnTo>
-                  <a:lnTo>
-                    <a:pt x="2005430" y="2051960"/>
-                  </a:lnTo>
-                  <a:lnTo>
-                    <a:pt x="2077053" y="2105368"/>
-                  </a:lnTo>
-                  <a:lnTo>
-                    <a:pt x="2148675" y="2156784"/>
-                  </a:lnTo>
-                  <a:lnTo>
-                    <a:pt x="2220298" y="2206282"/>
-                  </a:lnTo>
-                  <a:lnTo>
-                    <a:pt x="2291920" y="2253934"/>
-                  </a:lnTo>
-                  <a:lnTo>
-                    <a:pt x="2363543" y="2299809"/>
-                  </a:lnTo>
-                  <a:lnTo>
-                    <a:pt x="2435165" y="2343972"/>
-                  </a:lnTo>
-                  <a:lnTo>
-                    <a:pt x="2506788" y="2386488"/>
-                  </a:lnTo>
-                  <a:lnTo>
-                    <a:pt x="2578410" y="2427417"/>
-                  </a:lnTo>
-                  <a:lnTo>
-                    <a:pt x="2650033" y="2466820"/>
-                  </a:lnTo>
-                  <a:lnTo>
-                    <a:pt x="2721655" y="2504754"/>
-                  </a:lnTo>
-                  <a:lnTo>
-                    <a:pt x="2793278" y="2541272"/>
-                  </a:lnTo>
-                  <a:lnTo>
-                    <a:pt x="2864901" y="2576428"/>
-                  </a:lnTo>
-                  <a:lnTo>
-                    <a:pt x="2936523" y="2610273"/>
-                  </a:lnTo>
-                  <a:lnTo>
-                    <a:pt x="3008146" y="2642855"/>
-                  </a:lnTo>
-                  <a:lnTo>
-                    <a:pt x="3079768" y="2656040"/>
-                  </a:lnTo>
-                  <a:lnTo>
-                    <a:pt x="3151391" y="2658779"/>
-                  </a:lnTo>
-                  <a:lnTo>
-                    <a:pt x="3223013" y="2661509"/>
-                  </a:lnTo>
-                  <a:lnTo>
-                    <a:pt x="3294636" y="2664229"/>
-                  </a:lnTo>
-                  <a:lnTo>
-                    <a:pt x="3366258" y="2666941"/>
-                  </a:lnTo>
-                  <a:lnTo>
-                    <a:pt x="3437881" y="2669643"/>
-                  </a:lnTo>
-                  <a:lnTo>
-                    <a:pt x="3509503" y="2672337"/>
-                  </a:lnTo>
-                  <a:lnTo>
-                    <a:pt x="3581126" y="2675021"/>
-                  </a:lnTo>
-                  <a:lnTo>
-                    <a:pt x="3652748" y="2677697"/>
-                  </a:lnTo>
-                  <a:lnTo>
-                    <a:pt x="3724371" y="2680364"/>
-                  </a:lnTo>
-                  <a:lnTo>
-                    <a:pt x="3795993" y="2683022"/>
-                  </a:lnTo>
-                  <a:lnTo>
-                    <a:pt x="3867616" y="2685671"/>
-                  </a:lnTo>
-                  <a:lnTo>
-                    <a:pt x="3939238" y="2688312"/>
-                  </a:lnTo>
-                  <a:lnTo>
-                    <a:pt x="4010861" y="2690944"/>
-                  </a:lnTo>
-                  <a:lnTo>
-                    <a:pt x="4082483" y="2693567"/>
-                  </a:lnTo>
-                  <a:lnTo>
-                    <a:pt x="4154106" y="2696181"/>
-                  </a:lnTo>
-                  <a:lnTo>
-                    <a:pt x="4225729" y="2698787"/>
-                  </a:lnTo>
-                  <a:lnTo>
-                    <a:pt x="4297351" y="2701384"/>
-                  </a:lnTo>
-                  <a:lnTo>
-                    <a:pt x="4368974" y="2703973"/>
-                  </a:lnTo>
-                  <a:lnTo>
-                    <a:pt x="4440596" y="2706553"/>
-                  </a:lnTo>
-                  <a:lnTo>
-                    <a:pt x="4512219" y="2709124"/>
-                  </a:lnTo>
-                  <a:lnTo>
-                    <a:pt x="4583841" y="2711687"/>
-                  </a:lnTo>
-                  <a:lnTo>
-                    <a:pt x="4655464" y="2714242"/>
-                  </a:lnTo>
-                  <a:lnTo>
-                    <a:pt x="4727086" y="2716788"/>
-                  </a:lnTo>
-                  <a:lnTo>
-                    <a:pt x="4798709" y="2719325"/>
-                  </a:lnTo>
-                  <a:lnTo>
-                    <a:pt x="4870331" y="2721854"/>
-                  </a:lnTo>
-                  <a:lnTo>
-                    <a:pt x="4941954" y="2724375"/>
-                  </a:lnTo>
-                  <a:lnTo>
-                    <a:pt x="5013576" y="2726888"/>
-                  </a:lnTo>
-                  <a:lnTo>
-                    <a:pt x="5085199" y="2729392"/>
-                  </a:lnTo>
-                  <a:lnTo>
-                    <a:pt x="5156821" y="2731888"/>
-                  </a:lnTo>
-                  <a:lnTo>
-                    <a:pt x="5228444" y="2734375"/>
-                  </a:lnTo>
-                  <a:lnTo>
-                    <a:pt x="5300066" y="2736855"/>
-                  </a:lnTo>
-                  <a:lnTo>
-                    <a:pt x="5371689" y="2739326"/>
-                  </a:lnTo>
-                  <a:lnTo>
-                    <a:pt x="5443311" y="2741789"/>
-                  </a:lnTo>
-                  <a:lnTo>
-                    <a:pt x="5514934" y="2744244"/>
-                  </a:lnTo>
-                  <a:lnTo>
-                    <a:pt x="5586557" y="2746691"/>
-                  </a:lnTo>
-                  <a:lnTo>
-                    <a:pt x="5658179" y="2749129"/>
-                  </a:lnTo>
-                  <a:lnTo>
-                    <a:pt x="5729802" y="2751560"/>
-                  </a:lnTo>
-                  <a:lnTo>
-                    <a:pt x="5801424" y="2753982"/>
-                  </a:lnTo>
-                  <a:lnTo>
-                    <a:pt x="5873047" y="2756397"/>
-                  </a:lnTo>
-                  <a:lnTo>
-                    <a:pt x="5944669" y="2758804"/>
-                  </a:lnTo>
-                  <a:lnTo>
-                    <a:pt x="6016292" y="2761202"/>
-                  </a:lnTo>
-                  <a:lnTo>
-                    <a:pt x="6087914" y="2763593"/>
-                  </a:lnTo>
-                  <a:lnTo>
-                    <a:pt x="6159537" y="2765975"/>
-                  </a:lnTo>
-                  <a:lnTo>
-                    <a:pt x="6231159" y="2768350"/>
-                  </a:lnTo>
-                  <a:lnTo>
-                    <a:pt x="6302782" y="2770717"/>
-                  </a:lnTo>
-                  <a:lnTo>
-                    <a:pt x="6374404" y="2773076"/>
-                  </a:lnTo>
-                  <a:lnTo>
-                    <a:pt x="6446027" y="2775428"/>
-                  </a:lnTo>
-                  <a:lnTo>
-                    <a:pt x="6517649" y="2777771"/>
-                  </a:lnTo>
-                  <a:lnTo>
-                    <a:pt x="6589272" y="2780107"/>
-                  </a:lnTo>
-                  <a:lnTo>
-                    <a:pt x="6660894" y="2782435"/>
-                  </a:lnTo>
-                  <a:lnTo>
-                    <a:pt x="6732517" y="2784756"/>
-                  </a:lnTo>
-                  <a:lnTo>
-                    <a:pt x="6804139" y="2787068"/>
-                  </a:lnTo>
-                  <a:lnTo>
-                    <a:pt x="6875762" y="2789373"/>
-                  </a:lnTo>
-                  <a:lnTo>
-                    <a:pt x="6947385" y="2791671"/>
-                  </a:lnTo>
-                  <a:lnTo>
-                    <a:pt x="7019007" y="2793961"/>
-                  </a:lnTo>
-                  <a:lnTo>
-                    <a:pt x="7090630" y="2796243"/>
-                  </a:lnTo>
-                  <a:lnTo>
-                    <a:pt x="7090630" y="3387435"/>
-                  </a:lnTo>
-                  <a:lnTo>
-                    <a:pt x="7019007" y="3383704"/>
-                  </a:lnTo>
-                  <a:lnTo>
-                    <a:pt x="6947385" y="3379827"/>
-                  </a:lnTo>
-                  <a:lnTo>
-                    <a:pt x="6875762" y="3375801"/>
-                  </a:lnTo>
-                  <a:lnTo>
-                    <a:pt x="6804139" y="3371618"/>
-                  </a:lnTo>
-                  <a:lnTo>
-                    <a:pt x="6732517" y="3367273"/>
-                  </a:lnTo>
-                  <a:lnTo>
-                    <a:pt x="6660894" y="3362760"/>
-                  </a:lnTo>
-                  <a:lnTo>
-                    <a:pt x="6589272" y="3358072"/>
-                  </a:lnTo>
-                  <a:lnTo>
-                    <a:pt x="6517649" y="3353203"/>
-                  </a:lnTo>
-                  <a:lnTo>
-                    <a:pt x="6446027" y="3348145"/>
-                  </a:lnTo>
-                  <a:lnTo>
-                    <a:pt x="6374404" y="3342890"/>
-                  </a:lnTo>
-                  <a:lnTo>
-                    <a:pt x="6302782" y="3337433"/>
-                  </a:lnTo>
-                  <a:lnTo>
-                    <a:pt x="6231159" y="3331763"/>
-                  </a:lnTo>
-                  <a:lnTo>
-                    <a:pt x="6159537" y="3325875"/>
-                  </a:lnTo>
-                  <a:lnTo>
-                    <a:pt x="6087914" y="3319757"/>
-                  </a:lnTo>
-                  <a:lnTo>
-                    <a:pt x="6016292" y="3313403"/>
-                  </a:lnTo>
-                  <a:lnTo>
-                    <a:pt x="5944669" y="3306803"/>
-                  </a:lnTo>
-                  <a:lnTo>
-                    <a:pt x="5873047" y="3299947"/>
-                  </a:lnTo>
-                  <a:lnTo>
-                    <a:pt x="5801424" y="3292825"/>
-                  </a:lnTo>
-                  <a:lnTo>
-                    <a:pt x="5729802" y="3285427"/>
-                  </a:lnTo>
-                  <a:lnTo>
-                    <a:pt x="5658179" y="3277743"/>
-                  </a:lnTo>
-                  <a:lnTo>
-                    <a:pt x="5586557" y="3269761"/>
-                  </a:lnTo>
-                  <a:lnTo>
-                    <a:pt x="5514934" y="3261470"/>
-                  </a:lnTo>
-                  <a:lnTo>
-                    <a:pt x="5443311" y="3252857"/>
-                  </a:lnTo>
-                  <a:lnTo>
-                    <a:pt x="5371689" y="3243911"/>
-                  </a:lnTo>
-                  <a:lnTo>
-                    <a:pt x="5300066" y="3234618"/>
-                  </a:lnTo>
-                  <a:lnTo>
-                    <a:pt x="5228444" y="3224965"/>
-                  </a:lnTo>
-                  <a:lnTo>
-                    <a:pt x="5156821" y="3214938"/>
-                  </a:lnTo>
-                  <a:lnTo>
-                    <a:pt x="5085199" y="3204522"/>
-                  </a:lnTo>
-                  <a:lnTo>
-                    <a:pt x="5013576" y="3193703"/>
-                  </a:lnTo>
-                  <a:lnTo>
-                    <a:pt x="4941954" y="3182465"/>
-                  </a:lnTo>
-                  <a:lnTo>
-                    <a:pt x="4870331" y="3170791"/>
-                  </a:lnTo>
-                  <a:lnTo>
-                    <a:pt x="4798709" y="3158665"/>
-                  </a:lnTo>
-                  <a:lnTo>
-                    <a:pt x="4727086" y="3146069"/>
-                  </a:lnTo>
-                  <a:lnTo>
-                    <a:pt x="4655464" y="3132984"/>
-                  </a:lnTo>
-                  <a:lnTo>
-                    <a:pt x="4583841" y="3119393"/>
-                  </a:lnTo>
-                  <a:lnTo>
-                    <a:pt x="4512219" y="3105276"/>
-                  </a:lnTo>
-                  <a:lnTo>
-                    <a:pt x="4440596" y="3090611"/>
-                  </a:lnTo>
-                  <a:lnTo>
-                    <a:pt x="4368974" y="3075378"/>
-                  </a:lnTo>
-                  <a:lnTo>
-                    <a:pt x="4297351" y="3059555"/>
-                  </a:lnTo>
-                  <a:lnTo>
-                    <a:pt x="4225729" y="3043119"/>
-                  </a:lnTo>
-                  <a:lnTo>
-                    <a:pt x="4154106" y="3026046"/>
-                  </a:lnTo>
-                  <a:lnTo>
-                    <a:pt x="4082483" y="3008311"/>
-                  </a:lnTo>
-                  <a:lnTo>
-                    <a:pt x="4010861" y="2989889"/>
-                  </a:lnTo>
-                  <a:lnTo>
-                    <a:pt x="3939238" y="2970754"/>
-                  </a:lnTo>
-                  <a:lnTo>
-                    <a:pt x="3867616" y="2950876"/>
-                  </a:lnTo>
-                  <a:lnTo>
-                    <a:pt x="3795993" y="2930229"/>
-                  </a:lnTo>
-                  <a:lnTo>
-                    <a:pt x="3724371" y="2908782"/>
-                  </a:lnTo>
-                  <a:lnTo>
-                    <a:pt x="3652748" y="2886504"/>
-                  </a:lnTo>
-                  <a:lnTo>
-                    <a:pt x="3581126" y="2863362"/>
-                  </a:lnTo>
-                  <a:lnTo>
-                    <a:pt x="3509503" y="2839324"/>
-                  </a:lnTo>
-                  <a:lnTo>
-                    <a:pt x="3437881" y="2814354"/>
-                  </a:lnTo>
-                  <a:lnTo>
-                    <a:pt x="3366258" y="2788417"/>
-                  </a:lnTo>
-                  <a:lnTo>
-                    <a:pt x="3294636" y="2761475"/>
-                  </a:lnTo>
-                  <a:lnTo>
-                    <a:pt x="3223013" y="2733489"/>
-                  </a:lnTo>
-                  <a:lnTo>
-                    <a:pt x="3151391" y="2704419"/>
-                  </a:lnTo>
-                  <a:lnTo>
-                    <a:pt x="3079768" y="2674222"/>
-                  </a:lnTo>
-                  <a:lnTo>
-                    <a:pt x="3008146" y="2653293"/>
-                  </a:lnTo>
-                  <a:lnTo>
-                    <a:pt x="2936523" y="2650536"/>
-                  </a:lnTo>
-                  <a:lnTo>
-                    <a:pt x="2864901" y="2647770"/>
-                  </a:lnTo>
-                  <a:lnTo>
-                    <a:pt x="2793278" y="2644995"/>
-                  </a:lnTo>
-                  <a:lnTo>
-                    <a:pt x="2721655" y="2642211"/>
-                  </a:lnTo>
-                  <a:lnTo>
-                    <a:pt x="2650033" y="2639417"/>
-                  </a:lnTo>
-                  <a:lnTo>
-                    <a:pt x="2578410" y="2636614"/>
-                  </a:lnTo>
-                  <a:lnTo>
-                    <a:pt x="2506788" y="2633802"/>
-                  </a:lnTo>
-                  <a:lnTo>
-                    <a:pt x="2435165" y="2630981"/>
-                  </a:lnTo>
-                  <a:lnTo>
-                    <a:pt x="2363543" y="2628150"/>
-                  </a:lnTo>
-                  <a:lnTo>
-                    <a:pt x="2291920" y="2625309"/>
-                  </a:lnTo>
-                  <a:lnTo>
-                    <a:pt x="2220298" y="2622460"/>
-                  </a:lnTo>
-                  <a:lnTo>
-                    <a:pt x="2148675" y="2619601"/>
-                  </a:lnTo>
-                  <a:lnTo>
-                    <a:pt x="2077053" y="2616732"/>
-                  </a:lnTo>
-                  <a:lnTo>
-                    <a:pt x="2005430" y="2613854"/>
-                  </a:lnTo>
-                  <a:lnTo>
-                    <a:pt x="1933808" y="2610966"/>
-                  </a:lnTo>
-                  <a:lnTo>
-                    <a:pt x="1862185" y="2608069"/>
-                  </a:lnTo>
-                  <a:lnTo>
-                    <a:pt x="1790563" y="2605162"/>
-                  </a:lnTo>
-                  <a:lnTo>
-                    <a:pt x="1718940" y="2602245"/>
-                  </a:lnTo>
-                  <a:lnTo>
-                    <a:pt x="1647318" y="2599319"/>
-                  </a:lnTo>
-                  <a:lnTo>
-                    <a:pt x="1575695" y="2596383"/>
-                  </a:lnTo>
-                  <a:lnTo>
-                    <a:pt x="1504073" y="2593437"/>
-                  </a:lnTo>
-                  <a:lnTo>
-                    <a:pt x="1432450" y="2590482"/>
-                  </a:lnTo>
-                  <a:lnTo>
-                    <a:pt x="1360827" y="2587517"/>
-                  </a:lnTo>
-                  <a:lnTo>
-                    <a:pt x="1289205" y="2584541"/>
-                  </a:lnTo>
-                  <a:lnTo>
-                    <a:pt x="1217582" y="2581556"/>
-                  </a:lnTo>
-                  <a:lnTo>
-                    <a:pt x="1145960" y="2578561"/>
-                  </a:lnTo>
-                  <a:lnTo>
-                    <a:pt x="1074337" y="2575557"/>
-                  </a:lnTo>
-                  <a:lnTo>
-                    <a:pt x="1002715" y="2572542"/>
-                  </a:lnTo>
-                  <a:lnTo>
-                    <a:pt x="931092" y="2569517"/>
-                  </a:lnTo>
-                  <a:lnTo>
-                    <a:pt x="859470" y="2566482"/>
-                  </a:lnTo>
-                  <a:lnTo>
-                    <a:pt x="787847" y="2563437"/>
-                  </a:lnTo>
-                  <a:lnTo>
-                    <a:pt x="716225" y="2560382"/>
-                  </a:lnTo>
-                  <a:lnTo>
-                    <a:pt x="644602" y="2557317"/>
-                  </a:lnTo>
-                  <a:lnTo>
-                    <a:pt x="572980" y="2554241"/>
-                  </a:lnTo>
-                  <a:lnTo>
-                    <a:pt x="501357" y="2551156"/>
-                  </a:lnTo>
-                  <a:lnTo>
-                    <a:pt x="429735" y="2548060"/>
-                  </a:lnTo>
-                  <a:lnTo>
-                    <a:pt x="358112" y="2544954"/>
-                  </a:lnTo>
-                  <a:lnTo>
-                    <a:pt x="286490" y="2541837"/>
-                  </a:lnTo>
-                  <a:lnTo>
-                    <a:pt x="214867" y="2538710"/>
-                  </a:lnTo>
-                  <a:lnTo>
-                    <a:pt x="143245" y="2535573"/>
-                  </a:lnTo>
-                  <a:lnTo>
-                    <a:pt x="71622" y="2532426"/>
-                  </a:lnTo>
-                  <a:lnTo>
-                    <a:pt x="0" y="2529268"/>
+                    <a:pt x="358112" y="33985"/>
+                  </a:lnTo>
+                  <a:lnTo>
+                    <a:pt x="429735" y="163115"/>
+                  </a:lnTo>
+                  <a:lnTo>
+                    <a:pt x="501357" y="287411"/>
+                  </a:lnTo>
+                  <a:lnTo>
+                    <a:pt x="572980" y="407054"/>
+                  </a:lnTo>
+                  <a:lnTo>
+                    <a:pt x="644602" y="522219"/>
+                  </a:lnTo>
+                  <a:lnTo>
+                    <a:pt x="716225" y="633074"/>
+                  </a:lnTo>
+                  <a:lnTo>
+                    <a:pt x="787847" y="739778"/>
+                  </a:lnTo>
+                  <a:lnTo>
+                    <a:pt x="859470" y="842489"/>
+                  </a:lnTo>
+                  <a:lnTo>
+                    <a:pt x="931092" y="941355"/>
+                  </a:lnTo>
+                  <a:lnTo>
+                    <a:pt x="1002715" y="1036520"/>
+                  </a:lnTo>
+                  <a:lnTo>
+                    <a:pt x="1074337" y="1128124"/>
+                  </a:lnTo>
+                  <a:lnTo>
+                    <a:pt x="1145960" y="1216298"/>
+                  </a:lnTo>
+                  <a:lnTo>
+                    <a:pt x="1217582" y="1301172"/>
+                  </a:lnTo>
+                  <a:lnTo>
+                    <a:pt x="1289205" y="1382869"/>
+                  </a:lnTo>
+                  <a:lnTo>
+                    <a:pt x="1360827" y="1461508"/>
+                  </a:lnTo>
+                  <a:lnTo>
+                    <a:pt x="1432450" y="1537203"/>
+                  </a:lnTo>
+                  <a:lnTo>
+                    <a:pt x="1504073" y="1610065"/>
+                  </a:lnTo>
+                  <a:lnTo>
+                    <a:pt x="1575695" y="1680199"/>
+                  </a:lnTo>
+                  <a:lnTo>
+                    <a:pt x="1647318" y="1747709"/>
+                  </a:lnTo>
+                  <a:lnTo>
+                    <a:pt x="1718940" y="1812691"/>
+                  </a:lnTo>
+                  <a:lnTo>
+                    <a:pt x="1790563" y="1875241"/>
+                  </a:lnTo>
+                  <a:lnTo>
+                    <a:pt x="1862185" y="1935450"/>
+                  </a:lnTo>
+                  <a:lnTo>
+                    <a:pt x="1933808" y="1993405"/>
+                  </a:lnTo>
+                  <a:lnTo>
+                    <a:pt x="2005430" y="2049190"/>
+                  </a:lnTo>
+                  <a:lnTo>
+                    <a:pt x="2077053" y="2102888"/>
+                  </a:lnTo>
+                  <a:lnTo>
+                    <a:pt x="2148675" y="2154575"/>
+                  </a:lnTo>
+                  <a:lnTo>
+                    <a:pt x="2220298" y="2204328"/>
+                  </a:lnTo>
+                  <a:lnTo>
+                    <a:pt x="2291920" y="2252219"/>
+                  </a:lnTo>
+                  <a:lnTo>
+                    <a:pt x="2363543" y="2298317"/>
+                  </a:lnTo>
+                  <a:lnTo>
+                    <a:pt x="2435165" y="2342689"/>
+                  </a:lnTo>
+                  <a:lnTo>
+                    <a:pt x="2506788" y="2385400"/>
+                  </a:lnTo>
+                  <a:lnTo>
+                    <a:pt x="2578410" y="2426513"/>
+                  </a:lnTo>
+                  <a:lnTo>
+                    <a:pt x="2650033" y="2466087"/>
+                  </a:lnTo>
+                  <a:lnTo>
+                    <a:pt x="2721655" y="2504179"/>
+                  </a:lnTo>
+                  <a:lnTo>
+                    <a:pt x="2793278" y="2540846"/>
+                  </a:lnTo>
+                  <a:lnTo>
+                    <a:pt x="2864901" y="2576140"/>
+                  </a:lnTo>
+                  <a:lnTo>
+                    <a:pt x="2936523" y="2610113"/>
+                  </a:lnTo>
+                  <a:lnTo>
+                    <a:pt x="3008146" y="2642814"/>
+                  </a:lnTo>
+                  <a:lnTo>
+                    <a:pt x="3079768" y="2656120"/>
+                  </a:lnTo>
+                  <a:lnTo>
+                    <a:pt x="3151391" y="2658983"/>
+                  </a:lnTo>
+                  <a:lnTo>
+                    <a:pt x="3223013" y="2661836"/>
+                  </a:lnTo>
+                  <a:lnTo>
+                    <a:pt x="3294636" y="2664679"/>
+                  </a:lnTo>
+                  <a:lnTo>
+                    <a:pt x="3366258" y="2667512"/>
+                  </a:lnTo>
+                  <a:lnTo>
+                    <a:pt x="3437881" y="2670336"/>
+                  </a:lnTo>
+                  <a:lnTo>
+                    <a:pt x="3509503" y="2673149"/>
+                  </a:lnTo>
+                  <a:lnTo>
+                    <a:pt x="3581126" y="2675953"/>
+                  </a:lnTo>
+                  <a:lnTo>
+                    <a:pt x="3652748" y="2678748"/>
+                  </a:lnTo>
+                  <a:lnTo>
+                    <a:pt x="3724371" y="2681532"/>
+                  </a:lnTo>
+                  <a:lnTo>
+                    <a:pt x="3795993" y="2684307"/>
+                  </a:lnTo>
+                  <a:lnTo>
+                    <a:pt x="3867616" y="2687072"/>
+                  </a:lnTo>
+                  <a:lnTo>
+                    <a:pt x="3939238" y="2689828"/>
+                  </a:lnTo>
+                  <a:lnTo>
+                    <a:pt x="4010861" y="2692574"/>
+                  </a:lnTo>
+                  <a:lnTo>
+                    <a:pt x="4082483" y="2695311"/>
+                  </a:lnTo>
+                  <a:lnTo>
+                    <a:pt x="4154106" y="2698038"/>
+                  </a:lnTo>
+                  <a:lnTo>
+                    <a:pt x="4225729" y="2700756"/>
+                  </a:lnTo>
+                  <a:lnTo>
+                    <a:pt x="4297351" y="2703465"/>
+                  </a:lnTo>
+                  <a:lnTo>
+                    <a:pt x="4368974" y="2706164"/>
+                  </a:lnTo>
+                  <a:lnTo>
+                    <a:pt x="4440596" y="2708853"/>
+                  </a:lnTo>
+                  <a:lnTo>
+                    <a:pt x="4512219" y="2711534"/>
+                  </a:lnTo>
+                  <a:lnTo>
+                    <a:pt x="4583841" y="2714205"/>
+                  </a:lnTo>
+                  <a:lnTo>
+                    <a:pt x="4655464" y="2716867"/>
+                  </a:lnTo>
+                  <a:lnTo>
+                    <a:pt x="4727086" y="2719519"/>
+                  </a:lnTo>
+                  <a:lnTo>
+                    <a:pt x="4798709" y="2722163"/>
+                  </a:lnTo>
+                  <a:lnTo>
+                    <a:pt x="4870331" y="2724797"/>
+                  </a:lnTo>
+                  <a:lnTo>
+                    <a:pt x="4941954" y="2727423"/>
+                  </a:lnTo>
+                  <a:lnTo>
+                    <a:pt x="5013576" y="2730039"/>
+                  </a:lnTo>
+                  <a:lnTo>
+                    <a:pt x="5085199" y="2732646"/>
+                  </a:lnTo>
+                  <a:lnTo>
+                    <a:pt x="5156821" y="2735244"/>
+                  </a:lnTo>
+                  <a:lnTo>
+                    <a:pt x="5228444" y="2737833"/>
+                  </a:lnTo>
+                  <a:lnTo>
+                    <a:pt x="5300066" y="2740413"/>
+                  </a:lnTo>
+                  <a:lnTo>
+                    <a:pt x="5371689" y="2742984"/>
+                  </a:lnTo>
+                  <a:lnTo>
+                    <a:pt x="5443311" y="2745547"/>
+                  </a:lnTo>
+                  <a:lnTo>
+                    <a:pt x="5514934" y="2748100"/>
+                  </a:lnTo>
+                  <a:lnTo>
+                    <a:pt x="5586557" y="2750645"/>
+                  </a:lnTo>
+                  <a:lnTo>
+                    <a:pt x="5658179" y="2753181"/>
+                  </a:lnTo>
+                  <a:lnTo>
+                    <a:pt x="5729802" y="2755708"/>
+                  </a:lnTo>
+                  <a:lnTo>
+                    <a:pt x="5801424" y="2758226"/>
+                  </a:lnTo>
+                  <a:lnTo>
+                    <a:pt x="5873047" y="2760736"/>
+                  </a:lnTo>
+                  <a:lnTo>
+                    <a:pt x="5944669" y="2763237"/>
+                  </a:lnTo>
+                  <a:lnTo>
+                    <a:pt x="6016292" y="2765729"/>
+                  </a:lnTo>
+                  <a:lnTo>
+                    <a:pt x="6087914" y="2768213"/>
+                  </a:lnTo>
+                  <a:lnTo>
+                    <a:pt x="6159537" y="2770688"/>
+                  </a:lnTo>
+                  <a:lnTo>
+                    <a:pt x="6231159" y="2773154"/>
+                  </a:lnTo>
+                  <a:lnTo>
+                    <a:pt x="6302782" y="2775612"/>
+                  </a:lnTo>
+                  <a:lnTo>
+                    <a:pt x="6374404" y="2778062"/>
+                  </a:lnTo>
+                  <a:lnTo>
+                    <a:pt x="6446027" y="2780503"/>
+                  </a:lnTo>
+                  <a:lnTo>
+                    <a:pt x="6517649" y="2782935"/>
+                  </a:lnTo>
+                  <a:lnTo>
+                    <a:pt x="6589272" y="2785359"/>
+                  </a:lnTo>
+                  <a:lnTo>
+                    <a:pt x="6660894" y="2787775"/>
+                  </a:lnTo>
+                  <a:lnTo>
+                    <a:pt x="6732517" y="2790183"/>
+                  </a:lnTo>
+                  <a:lnTo>
+                    <a:pt x="6804139" y="2792582"/>
+                  </a:lnTo>
+                  <a:lnTo>
+                    <a:pt x="6875762" y="2794973"/>
+                  </a:lnTo>
+                  <a:lnTo>
+                    <a:pt x="6947385" y="2797355"/>
+                  </a:lnTo>
+                  <a:lnTo>
+                    <a:pt x="7019007" y="2799729"/>
+                  </a:lnTo>
+                  <a:lnTo>
+                    <a:pt x="7090630" y="2802095"/>
+                  </a:lnTo>
+                  <a:lnTo>
+                    <a:pt x="7090630" y="3388167"/>
+                  </a:lnTo>
+                  <a:lnTo>
+                    <a:pt x="7019007" y="3384450"/>
+                  </a:lnTo>
+                  <a:lnTo>
+                    <a:pt x="6947385" y="3380588"/>
+                  </a:lnTo>
+                  <a:lnTo>
+                    <a:pt x="6875762" y="3376577"/>
+                  </a:lnTo>
+                  <a:lnTo>
+                    <a:pt x="6804139" y="3372409"/>
+                  </a:lnTo>
+                  <a:lnTo>
+                    <a:pt x="6732517" y="3368080"/>
+                  </a:lnTo>
+                  <a:lnTo>
+                    <a:pt x="6660894" y="3363582"/>
+                  </a:lnTo>
+                  <a:lnTo>
+                    <a:pt x="6589272" y="3358909"/>
+                  </a:lnTo>
+                  <a:lnTo>
+                    <a:pt x="6517649" y="3354054"/>
+                  </a:lnTo>
+                  <a:lnTo>
+                    <a:pt x="6446027" y="3349011"/>
+                  </a:lnTo>
+                  <a:lnTo>
+                    <a:pt x="6374404" y="3343772"/>
+                  </a:lnTo>
+                  <a:lnTo>
+                    <a:pt x="6302782" y="3338329"/>
+                  </a:lnTo>
+                  <a:lnTo>
+                    <a:pt x="6231159" y="3332674"/>
+                  </a:lnTo>
+                  <a:lnTo>
+                    <a:pt x="6159537" y="3326799"/>
+                  </a:lnTo>
+                  <a:lnTo>
+                    <a:pt x="6087914" y="3320696"/>
+                  </a:lnTo>
+                  <a:lnTo>
+                    <a:pt x="6016292" y="3314355"/>
+                  </a:lnTo>
+                  <a:lnTo>
+                    <a:pt x="5944669" y="3307768"/>
+                  </a:lnTo>
+                  <a:lnTo>
+                    <a:pt x="5873047" y="3300925"/>
+                  </a:lnTo>
+                  <a:lnTo>
+                    <a:pt x="5801424" y="3293815"/>
+                  </a:lnTo>
+                  <a:lnTo>
+                    <a:pt x="5729802" y="3286429"/>
+                  </a:lnTo>
+                  <a:lnTo>
+                    <a:pt x="5658179" y="3278756"/>
+                  </a:lnTo>
+                  <a:lnTo>
+                    <a:pt x="5586557" y="3270785"/>
+                  </a:lnTo>
+                  <a:lnTo>
+                    <a:pt x="5514934" y="3262503"/>
+                  </a:lnTo>
+                  <a:lnTo>
+                    <a:pt x="5443311" y="3253900"/>
+                  </a:lnTo>
+                  <a:lnTo>
+                    <a:pt x="5371689" y="3244962"/>
+                  </a:lnTo>
+                  <a:lnTo>
+                    <a:pt x="5300066" y="3235676"/>
+                  </a:lnTo>
+                  <a:lnTo>
+                    <a:pt x="5228444" y="3226030"/>
+                  </a:lnTo>
+                  <a:lnTo>
+                    <a:pt x="5156821" y="3216008"/>
+                  </a:lnTo>
+                  <a:lnTo>
+                    <a:pt x="5085199" y="3205596"/>
+                  </a:lnTo>
+                  <a:lnTo>
+                    <a:pt x="5013576" y="3194780"/>
+                  </a:lnTo>
+                  <a:lnTo>
+                    <a:pt x="4941954" y="3183543"/>
+                  </a:lnTo>
+                  <a:lnTo>
+                    <a:pt x="4870331" y="3171869"/>
+                  </a:lnTo>
+                  <a:lnTo>
+                    <a:pt x="4798709" y="3159741"/>
+                  </a:lnTo>
+                  <a:lnTo>
+                    <a:pt x="4727086" y="3147141"/>
+                  </a:lnTo>
+                  <a:lnTo>
+                    <a:pt x="4655464" y="3134051"/>
+                  </a:lnTo>
+                  <a:lnTo>
+                    <a:pt x="4583841" y="3120453"/>
+                  </a:lnTo>
+                  <a:lnTo>
+                    <a:pt x="4512219" y="3106325"/>
+                  </a:lnTo>
+                  <a:lnTo>
+                    <a:pt x="4440596" y="3091649"/>
+                  </a:lnTo>
+                  <a:lnTo>
+                    <a:pt x="4368974" y="3076401"/>
+                  </a:lnTo>
+                  <a:lnTo>
+                    <a:pt x="4297351" y="3060561"/>
+                  </a:lnTo>
+                  <a:lnTo>
+                    <a:pt x="4225729" y="3044104"/>
+                  </a:lnTo>
+                  <a:lnTo>
+                    <a:pt x="4154106" y="3027008"/>
+                  </a:lnTo>
+                  <a:lnTo>
+                    <a:pt x="4082483" y="3009247"/>
+                  </a:lnTo>
+                  <a:lnTo>
+                    <a:pt x="4010861" y="2990795"/>
+                  </a:lnTo>
+                  <a:lnTo>
+                    <a:pt x="3939238" y="2971625"/>
+                  </a:lnTo>
+                  <a:lnTo>
+                    <a:pt x="3867616" y="2951710"/>
+                  </a:lnTo>
+                  <a:lnTo>
+                    <a:pt x="3795993" y="2931021"/>
+                  </a:lnTo>
+                  <a:lnTo>
+                    <a:pt x="3724371" y="2909527"/>
+                  </a:lnTo>
+                  <a:lnTo>
+                    <a:pt x="3652748" y="2887198"/>
+                  </a:lnTo>
+                  <a:lnTo>
+                    <a:pt x="3581126" y="2864000"/>
+                  </a:lnTo>
+                  <a:lnTo>
+                    <a:pt x="3509503" y="2839899"/>
+                  </a:lnTo>
+                  <a:lnTo>
+                    <a:pt x="3437881" y="2814862"/>
+                  </a:lnTo>
+                  <a:lnTo>
+                    <a:pt x="3366258" y="2788851"/>
+                  </a:lnTo>
+                  <a:lnTo>
+                    <a:pt x="3294636" y="2761829"/>
+                  </a:lnTo>
+                  <a:lnTo>
+                    <a:pt x="3223013" y="2733756"/>
+                  </a:lnTo>
+                  <a:lnTo>
+                    <a:pt x="3151391" y="2704591"/>
+                  </a:lnTo>
+                  <a:lnTo>
+                    <a:pt x="3079768" y="2674292"/>
+                  </a:lnTo>
+                  <a:lnTo>
+                    <a:pt x="3008146" y="2653248"/>
+                  </a:lnTo>
+                  <a:lnTo>
+                    <a:pt x="2936523" y="2650365"/>
+                  </a:lnTo>
+                  <a:lnTo>
+                    <a:pt x="2864901" y="2647472"/>
+                  </a:lnTo>
+                  <a:lnTo>
+                    <a:pt x="2793278" y="2644569"/>
+                  </a:lnTo>
+                  <a:lnTo>
+                    <a:pt x="2721655" y="2641657"/>
+                  </a:lnTo>
+                  <a:lnTo>
+                    <a:pt x="2650033" y="2638734"/>
+                  </a:lnTo>
+                  <a:lnTo>
+                    <a:pt x="2578410" y="2635801"/>
+                  </a:lnTo>
+                  <a:lnTo>
+                    <a:pt x="2506788" y="2632857"/>
+                  </a:lnTo>
+                  <a:lnTo>
+                    <a:pt x="2435165" y="2629904"/>
+                  </a:lnTo>
+                  <a:lnTo>
+                    <a:pt x="2363543" y="2626940"/>
+                  </a:lnTo>
+                  <a:lnTo>
+                    <a:pt x="2291920" y="2623966"/>
+                  </a:lnTo>
+                  <a:lnTo>
+                    <a:pt x="2220298" y="2620982"/>
+                  </a:lnTo>
+                  <a:lnTo>
+                    <a:pt x="2148675" y="2617987"/>
+                  </a:lnTo>
+                  <a:lnTo>
+                    <a:pt x="2077053" y="2614982"/>
+                  </a:lnTo>
+                  <a:lnTo>
+                    <a:pt x="2005430" y="2611966"/>
+                  </a:lnTo>
+                  <a:lnTo>
+                    <a:pt x="1933808" y="2608940"/>
+                  </a:lnTo>
+                  <a:lnTo>
+                    <a:pt x="1862185" y="2605904"/>
+                  </a:lnTo>
+                  <a:lnTo>
+                    <a:pt x="1790563" y="2602857"/>
+                  </a:lnTo>
+                  <a:lnTo>
+                    <a:pt x="1718940" y="2599799"/>
+                  </a:lnTo>
+                  <a:lnTo>
+                    <a:pt x="1647318" y="2596731"/>
+                  </a:lnTo>
+                  <a:lnTo>
+                    <a:pt x="1575695" y="2593652"/>
+                  </a:lnTo>
+                  <a:lnTo>
+                    <a:pt x="1504073" y="2590562"/>
+                  </a:lnTo>
+                  <a:lnTo>
+                    <a:pt x="1432450" y="2587462"/>
+                  </a:lnTo>
+                  <a:lnTo>
+                    <a:pt x="1360827" y="2584351"/>
+                  </a:lnTo>
+                  <a:lnTo>
+                    <a:pt x="1289205" y="2581229"/>
+                  </a:lnTo>
+                  <a:lnTo>
+                    <a:pt x="1217582" y="2578096"/>
+                  </a:lnTo>
+                  <a:lnTo>
+                    <a:pt x="1145960" y="2574953"/>
+                  </a:lnTo>
+                  <a:lnTo>
+                    <a:pt x="1074337" y="2571798"/>
+                  </a:lnTo>
+                  <a:lnTo>
+                    <a:pt x="1002715" y="2568633"/>
+                  </a:lnTo>
+                  <a:lnTo>
+                    <a:pt x="931092" y="2565456"/>
+                  </a:lnTo>
+                  <a:lnTo>
+                    <a:pt x="859470" y="2562269"/>
+                  </a:lnTo>
+                  <a:lnTo>
+                    <a:pt x="787847" y="2559070"/>
+                  </a:lnTo>
+                  <a:lnTo>
+                    <a:pt x="716225" y="2555861"/>
+                  </a:lnTo>
+                  <a:lnTo>
+                    <a:pt x="644602" y="2552640"/>
+                  </a:lnTo>
+                  <a:lnTo>
+                    <a:pt x="572980" y="2549408"/>
+                  </a:lnTo>
+                  <a:lnTo>
+                    <a:pt x="501357" y="2546165"/>
+                  </a:lnTo>
+                  <a:lnTo>
+                    <a:pt x="429735" y="2542911"/>
+                  </a:lnTo>
+                  <a:lnTo>
+                    <a:pt x="358112" y="2539645"/>
+                  </a:lnTo>
+                  <a:lnTo>
+                    <a:pt x="286490" y="2536368"/>
+                  </a:lnTo>
+                  <a:lnTo>
+                    <a:pt x="214867" y="2533079"/>
+                  </a:lnTo>
+                  <a:lnTo>
+                    <a:pt x="143245" y="2529780"/>
+                  </a:lnTo>
+                  <a:lnTo>
+                    <a:pt x="71622" y="2526468"/>
+                  </a:lnTo>
+                  <a:lnTo>
+                    <a:pt x="0" y="2523146"/>
                   </a:lnTo>
                   <a:close/>
                 </a:path>
@@ -3664,300 +3664,300 @@
           </p:nvSpPr>
           <p:spPr>
             <a:xfrm>
-              <a:off x="1502544" y="2073503"/>
-              <a:ext cx="6760135" cy="2796243"/>
+              <a:off x="1512017" y="2073503"/>
+              <a:ext cx="6750662" cy="2802095"/>
             </a:xfrm>
             <a:custGeom>
               <a:avLst/>
               <a:pathLst>
-                <a:path w="6760135" h="2796243">
+                <a:path w="6750662" h="2802095">
                   <a:moveTo>
                     <a:pt x="0" y="0"/>
                   </a:moveTo>
                   <a:lnTo>
-                    <a:pt x="27617" y="51284"/>
-                  </a:lnTo>
-                  <a:lnTo>
-                    <a:pt x="99240" y="179322"/>
-                  </a:lnTo>
-                  <a:lnTo>
-                    <a:pt x="170863" y="302583"/>
-                  </a:lnTo>
-                  <a:lnTo>
-                    <a:pt x="242485" y="421246"/>
-                  </a:lnTo>
-                  <a:lnTo>
-                    <a:pt x="314108" y="535484"/>
-                  </a:lnTo>
-                  <a:lnTo>
-                    <a:pt x="385730" y="645459"/>
-                  </a:lnTo>
-                  <a:lnTo>
-                    <a:pt x="457353" y="751333"/>
-                  </a:lnTo>
-                  <a:lnTo>
-                    <a:pt x="528975" y="853257"/>
-                  </a:lnTo>
-                  <a:lnTo>
-                    <a:pt x="600598" y="951379"/>
-                  </a:lnTo>
-                  <a:lnTo>
-                    <a:pt x="672220" y="1045842"/>
-                  </a:lnTo>
-                  <a:lnTo>
-                    <a:pt x="743843" y="1136780"/>
-                  </a:lnTo>
-                  <a:lnTo>
-                    <a:pt x="815465" y="1224326"/>
-                  </a:lnTo>
-                  <a:lnTo>
-                    <a:pt x="887088" y="1308607"/>
-                  </a:lnTo>
-                  <a:lnTo>
-                    <a:pt x="958710" y="1389744"/>
-                  </a:lnTo>
-                  <a:lnTo>
-                    <a:pt x="1030333" y="1467854"/>
-                  </a:lnTo>
-                  <a:lnTo>
-                    <a:pt x="1101955" y="1543051"/>
-                  </a:lnTo>
-                  <a:lnTo>
-                    <a:pt x="1173578" y="1615442"/>
-                  </a:lnTo>
-                  <a:lnTo>
-                    <a:pt x="1245200" y="1685134"/>
-                  </a:lnTo>
-                  <a:lnTo>
-                    <a:pt x="1316823" y="1752225"/>
-                  </a:lnTo>
-                  <a:lnTo>
-                    <a:pt x="1388445" y="1816814"/>
-                  </a:lnTo>
-                  <a:lnTo>
-                    <a:pt x="1460068" y="1878994"/>
-                  </a:lnTo>
-                  <a:lnTo>
-                    <a:pt x="1531691" y="1938854"/>
-                  </a:lnTo>
-                  <a:lnTo>
-                    <a:pt x="1603313" y="1996482"/>
-                  </a:lnTo>
-                  <a:lnTo>
-                    <a:pt x="1674936" y="2051960"/>
-                  </a:lnTo>
-                  <a:lnTo>
-                    <a:pt x="1746558" y="2105368"/>
-                  </a:lnTo>
-                  <a:lnTo>
-                    <a:pt x="1818181" y="2156784"/>
-                  </a:lnTo>
-                  <a:lnTo>
-                    <a:pt x="1889803" y="2206282"/>
-                  </a:lnTo>
-                  <a:lnTo>
-                    <a:pt x="1961426" y="2253934"/>
-                  </a:lnTo>
-                  <a:lnTo>
-                    <a:pt x="2033048" y="2299809"/>
-                  </a:lnTo>
-                  <a:lnTo>
-                    <a:pt x="2104671" y="2343972"/>
-                  </a:lnTo>
-                  <a:lnTo>
-                    <a:pt x="2176293" y="2386488"/>
-                  </a:lnTo>
-                  <a:lnTo>
-                    <a:pt x="2247916" y="2427417"/>
-                  </a:lnTo>
-                  <a:lnTo>
-                    <a:pt x="2319538" y="2466820"/>
-                  </a:lnTo>
-                  <a:lnTo>
-                    <a:pt x="2391161" y="2504754"/>
-                  </a:lnTo>
-                  <a:lnTo>
-                    <a:pt x="2462783" y="2541272"/>
-                  </a:lnTo>
-                  <a:lnTo>
-                    <a:pt x="2534406" y="2576428"/>
-                  </a:lnTo>
-                  <a:lnTo>
-                    <a:pt x="2606028" y="2610273"/>
-                  </a:lnTo>
-                  <a:lnTo>
-                    <a:pt x="2677651" y="2642855"/>
-                  </a:lnTo>
-                  <a:lnTo>
-                    <a:pt x="2749273" y="2656040"/>
-                  </a:lnTo>
-                  <a:lnTo>
-                    <a:pt x="2820896" y="2658779"/>
-                  </a:lnTo>
-                  <a:lnTo>
-                    <a:pt x="2892519" y="2661509"/>
-                  </a:lnTo>
-                  <a:lnTo>
-                    <a:pt x="2964141" y="2664229"/>
-                  </a:lnTo>
-                  <a:lnTo>
-                    <a:pt x="3035764" y="2666941"/>
-                  </a:lnTo>
-                  <a:lnTo>
-                    <a:pt x="3107386" y="2669643"/>
-                  </a:lnTo>
-                  <a:lnTo>
-                    <a:pt x="3179009" y="2672337"/>
-                  </a:lnTo>
-                  <a:lnTo>
-                    <a:pt x="3250631" y="2675021"/>
-                  </a:lnTo>
-                  <a:lnTo>
-                    <a:pt x="3322254" y="2677697"/>
-                  </a:lnTo>
-                  <a:lnTo>
-                    <a:pt x="3393876" y="2680364"/>
-                  </a:lnTo>
-                  <a:lnTo>
-                    <a:pt x="3465499" y="2683022"/>
-                  </a:lnTo>
-                  <a:lnTo>
-                    <a:pt x="3537121" y="2685671"/>
-                  </a:lnTo>
-                  <a:lnTo>
-                    <a:pt x="3608744" y="2688312"/>
-                  </a:lnTo>
-                  <a:lnTo>
-                    <a:pt x="3680366" y="2690944"/>
-                  </a:lnTo>
-                  <a:lnTo>
-                    <a:pt x="3751989" y="2693567"/>
-                  </a:lnTo>
-                  <a:lnTo>
-                    <a:pt x="3823611" y="2696181"/>
-                  </a:lnTo>
-                  <a:lnTo>
-                    <a:pt x="3895234" y="2698787"/>
-                  </a:lnTo>
-                  <a:lnTo>
-                    <a:pt x="3966856" y="2701384"/>
-                  </a:lnTo>
-                  <a:lnTo>
-                    <a:pt x="4038479" y="2703973"/>
-                  </a:lnTo>
-                  <a:lnTo>
-                    <a:pt x="4110101" y="2706553"/>
-                  </a:lnTo>
-                  <a:lnTo>
-                    <a:pt x="4181724" y="2709124"/>
-                  </a:lnTo>
-                  <a:lnTo>
-                    <a:pt x="4253346" y="2711687"/>
-                  </a:lnTo>
-                  <a:lnTo>
-                    <a:pt x="4324969" y="2714242"/>
-                  </a:lnTo>
-                  <a:lnTo>
-                    <a:pt x="4396592" y="2716788"/>
-                  </a:lnTo>
-                  <a:lnTo>
-                    <a:pt x="4468214" y="2719325"/>
-                  </a:lnTo>
-                  <a:lnTo>
-                    <a:pt x="4539837" y="2721854"/>
-                  </a:lnTo>
-                  <a:lnTo>
-                    <a:pt x="4611459" y="2724375"/>
-                  </a:lnTo>
-                  <a:lnTo>
-                    <a:pt x="4683082" y="2726888"/>
-                  </a:lnTo>
-                  <a:lnTo>
-                    <a:pt x="4754704" y="2729392"/>
-                  </a:lnTo>
-                  <a:lnTo>
-                    <a:pt x="4826327" y="2731888"/>
-                  </a:lnTo>
-                  <a:lnTo>
-                    <a:pt x="4897949" y="2734375"/>
-                  </a:lnTo>
-                  <a:lnTo>
-                    <a:pt x="4969572" y="2736855"/>
-                  </a:lnTo>
-                  <a:lnTo>
-                    <a:pt x="5041194" y="2739326"/>
-                  </a:lnTo>
-                  <a:lnTo>
-                    <a:pt x="5112817" y="2741789"/>
-                  </a:lnTo>
-                  <a:lnTo>
-                    <a:pt x="5184439" y="2744244"/>
-                  </a:lnTo>
-                  <a:lnTo>
-                    <a:pt x="5256062" y="2746691"/>
-                  </a:lnTo>
-                  <a:lnTo>
-                    <a:pt x="5327684" y="2749129"/>
-                  </a:lnTo>
-                  <a:lnTo>
-                    <a:pt x="5399307" y="2751560"/>
-                  </a:lnTo>
-                  <a:lnTo>
-                    <a:pt x="5470929" y="2753982"/>
-                  </a:lnTo>
-                  <a:lnTo>
-                    <a:pt x="5542552" y="2756397"/>
-                  </a:lnTo>
-                  <a:lnTo>
-                    <a:pt x="5614174" y="2758804"/>
-                  </a:lnTo>
-                  <a:lnTo>
-                    <a:pt x="5685797" y="2761202"/>
-                  </a:lnTo>
-                  <a:lnTo>
-                    <a:pt x="5757420" y="2763593"/>
-                  </a:lnTo>
-                  <a:lnTo>
-                    <a:pt x="5829042" y="2765975"/>
-                  </a:lnTo>
-                  <a:lnTo>
-                    <a:pt x="5900665" y="2768350"/>
-                  </a:lnTo>
-                  <a:lnTo>
-                    <a:pt x="5972287" y="2770717"/>
-                  </a:lnTo>
-                  <a:lnTo>
-                    <a:pt x="6043910" y="2773076"/>
-                  </a:lnTo>
-                  <a:lnTo>
-                    <a:pt x="6115532" y="2775428"/>
-                  </a:lnTo>
-                  <a:lnTo>
-                    <a:pt x="6187155" y="2777771"/>
-                  </a:lnTo>
-                  <a:lnTo>
-                    <a:pt x="6258777" y="2780107"/>
-                  </a:lnTo>
-                  <a:lnTo>
-                    <a:pt x="6330400" y="2782435"/>
-                  </a:lnTo>
-                  <a:lnTo>
-                    <a:pt x="6402022" y="2784756"/>
-                  </a:lnTo>
-                  <a:lnTo>
-                    <a:pt x="6473645" y="2787068"/>
-                  </a:lnTo>
-                  <a:lnTo>
-                    <a:pt x="6545267" y="2789373"/>
-                  </a:lnTo>
-                  <a:lnTo>
-                    <a:pt x="6616890" y="2791671"/>
-                  </a:lnTo>
-                  <a:lnTo>
-                    <a:pt x="6688512" y="2793961"/>
-                  </a:lnTo>
-                  <a:lnTo>
-                    <a:pt x="6760135" y="2796243"/>
+                    <a:pt x="18144" y="33985"/>
+                  </a:lnTo>
+                  <a:lnTo>
+                    <a:pt x="89767" y="163115"/>
+                  </a:lnTo>
+                  <a:lnTo>
+                    <a:pt x="161389" y="287411"/>
+                  </a:lnTo>
+                  <a:lnTo>
+                    <a:pt x="233012" y="407054"/>
+                  </a:lnTo>
+                  <a:lnTo>
+                    <a:pt x="304634" y="522219"/>
+                  </a:lnTo>
+                  <a:lnTo>
+                    <a:pt x="376257" y="633074"/>
+                  </a:lnTo>
+                  <a:lnTo>
+                    <a:pt x="447879" y="739778"/>
+                  </a:lnTo>
+                  <a:lnTo>
+                    <a:pt x="519502" y="842489"/>
+                  </a:lnTo>
+                  <a:lnTo>
+                    <a:pt x="591125" y="941355"/>
+                  </a:lnTo>
+                  <a:lnTo>
+                    <a:pt x="662747" y="1036520"/>
+                  </a:lnTo>
+                  <a:lnTo>
+                    <a:pt x="734370" y="1128124"/>
+                  </a:lnTo>
+                  <a:lnTo>
+                    <a:pt x="805992" y="1216298"/>
+                  </a:lnTo>
+                  <a:lnTo>
+                    <a:pt x="877615" y="1301172"/>
+                  </a:lnTo>
+                  <a:lnTo>
+                    <a:pt x="949237" y="1382869"/>
+                  </a:lnTo>
+                  <a:lnTo>
+                    <a:pt x="1020860" y="1461508"/>
+                  </a:lnTo>
+                  <a:lnTo>
+                    <a:pt x="1092482" y="1537203"/>
+                  </a:lnTo>
+                  <a:lnTo>
+                    <a:pt x="1164105" y="1610065"/>
+                  </a:lnTo>
+                  <a:lnTo>
+                    <a:pt x="1235727" y="1680199"/>
+                  </a:lnTo>
+                  <a:lnTo>
+                    <a:pt x="1307350" y="1747709"/>
+                  </a:lnTo>
+                  <a:lnTo>
+                    <a:pt x="1378972" y="1812691"/>
+                  </a:lnTo>
+                  <a:lnTo>
+                    <a:pt x="1450595" y="1875241"/>
+                  </a:lnTo>
+                  <a:lnTo>
+                    <a:pt x="1522217" y="1935450"/>
+                  </a:lnTo>
+                  <a:lnTo>
+                    <a:pt x="1593840" y="1993405"/>
+                  </a:lnTo>
+                  <a:lnTo>
+                    <a:pt x="1665462" y="2049190"/>
+                  </a:lnTo>
+                  <a:lnTo>
+                    <a:pt x="1737085" y="2102888"/>
+                  </a:lnTo>
+                  <a:lnTo>
+                    <a:pt x="1808707" y="2154575"/>
+                  </a:lnTo>
+                  <a:lnTo>
+                    <a:pt x="1880330" y="2204328"/>
+                  </a:lnTo>
+                  <a:lnTo>
+                    <a:pt x="1951953" y="2252219"/>
+                  </a:lnTo>
+                  <a:lnTo>
+                    <a:pt x="2023575" y="2298317"/>
+                  </a:lnTo>
+                  <a:lnTo>
+                    <a:pt x="2095198" y="2342689"/>
+                  </a:lnTo>
+                  <a:lnTo>
+                    <a:pt x="2166820" y="2385400"/>
+                  </a:lnTo>
+                  <a:lnTo>
+                    <a:pt x="2238443" y="2426513"/>
+                  </a:lnTo>
+                  <a:lnTo>
+                    <a:pt x="2310065" y="2466087"/>
+                  </a:lnTo>
+                  <a:lnTo>
+                    <a:pt x="2381688" y="2504179"/>
+                  </a:lnTo>
+                  <a:lnTo>
+                    <a:pt x="2453310" y="2540846"/>
+                  </a:lnTo>
+                  <a:lnTo>
+                    <a:pt x="2524933" y="2576140"/>
+                  </a:lnTo>
+                  <a:lnTo>
+                    <a:pt x="2596555" y="2610113"/>
+                  </a:lnTo>
+                  <a:lnTo>
+                    <a:pt x="2668178" y="2642814"/>
+                  </a:lnTo>
+                  <a:lnTo>
+                    <a:pt x="2739800" y="2656120"/>
+                  </a:lnTo>
+                  <a:lnTo>
+                    <a:pt x="2811423" y="2658983"/>
+                  </a:lnTo>
+                  <a:lnTo>
+                    <a:pt x="2883045" y="2661836"/>
+                  </a:lnTo>
+                  <a:lnTo>
+                    <a:pt x="2954668" y="2664679"/>
+                  </a:lnTo>
+                  <a:lnTo>
+                    <a:pt x="3026290" y="2667512"/>
+                  </a:lnTo>
+                  <a:lnTo>
+                    <a:pt x="3097913" y="2670336"/>
+                  </a:lnTo>
+                  <a:lnTo>
+                    <a:pt x="3169535" y="2673149"/>
+                  </a:lnTo>
+                  <a:lnTo>
+                    <a:pt x="3241158" y="2675953"/>
+                  </a:lnTo>
+                  <a:lnTo>
+                    <a:pt x="3312781" y="2678748"/>
+                  </a:lnTo>
+                  <a:lnTo>
+                    <a:pt x="3384403" y="2681532"/>
+                  </a:lnTo>
+                  <a:lnTo>
+                    <a:pt x="3456026" y="2684307"/>
+                  </a:lnTo>
+                  <a:lnTo>
+                    <a:pt x="3527648" y="2687072"/>
+                  </a:lnTo>
+                  <a:lnTo>
+                    <a:pt x="3599271" y="2689828"/>
+                  </a:lnTo>
+                  <a:lnTo>
+                    <a:pt x="3670893" y="2692574"/>
+                  </a:lnTo>
+                  <a:lnTo>
+                    <a:pt x="3742516" y="2695311"/>
+                  </a:lnTo>
+                  <a:lnTo>
+                    <a:pt x="3814138" y="2698038"/>
+                  </a:lnTo>
+                  <a:lnTo>
+                    <a:pt x="3885761" y="2700756"/>
+                  </a:lnTo>
+                  <a:lnTo>
+                    <a:pt x="3957383" y="2703465"/>
+                  </a:lnTo>
+                  <a:lnTo>
+                    <a:pt x="4029006" y="2706164"/>
+                  </a:lnTo>
+                  <a:lnTo>
+                    <a:pt x="4100628" y="2708853"/>
+                  </a:lnTo>
+                  <a:lnTo>
+                    <a:pt x="4172251" y="2711534"/>
+                  </a:lnTo>
+                  <a:lnTo>
+                    <a:pt x="4243873" y="2714205"/>
+                  </a:lnTo>
+                  <a:lnTo>
+                    <a:pt x="4315496" y="2716867"/>
+                  </a:lnTo>
+                  <a:lnTo>
+                    <a:pt x="4387118" y="2719519"/>
+                  </a:lnTo>
+                  <a:lnTo>
+                    <a:pt x="4458741" y="2722163"/>
+                  </a:lnTo>
+                  <a:lnTo>
+                    <a:pt x="4530363" y="2724797"/>
+                  </a:lnTo>
+                  <a:lnTo>
+                    <a:pt x="4601986" y="2727423"/>
+                  </a:lnTo>
+                  <a:lnTo>
+                    <a:pt x="4673609" y="2730039"/>
+                  </a:lnTo>
+                  <a:lnTo>
+                    <a:pt x="4745231" y="2732646"/>
+                  </a:lnTo>
+                  <a:lnTo>
+                    <a:pt x="4816854" y="2735244"/>
+                  </a:lnTo>
+                  <a:lnTo>
+                    <a:pt x="4888476" y="2737833"/>
+                  </a:lnTo>
+                  <a:lnTo>
+                    <a:pt x="4960099" y="2740413"/>
+                  </a:lnTo>
+                  <a:lnTo>
+                    <a:pt x="5031721" y="2742984"/>
+                  </a:lnTo>
+                  <a:lnTo>
+                    <a:pt x="5103344" y="2745547"/>
+                  </a:lnTo>
+                  <a:lnTo>
+                    <a:pt x="5174966" y="2748100"/>
+                  </a:lnTo>
+                  <a:lnTo>
+                    <a:pt x="5246589" y="2750645"/>
+                  </a:lnTo>
+                  <a:lnTo>
+                    <a:pt x="5318211" y="2753181"/>
+                  </a:lnTo>
+                  <a:lnTo>
+                    <a:pt x="5389834" y="2755708"/>
+                  </a:lnTo>
+                  <a:lnTo>
+                    <a:pt x="5461456" y="2758226"/>
+                  </a:lnTo>
+                  <a:lnTo>
+                    <a:pt x="5533079" y="2760736"/>
+                  </a:lnTo>
+                  <a:lnTo>
+                    <a:pt x="5604701" y="2763237"/>
+                  </a:lnTo>
+                  <a:lnTo>
+                    <a:pt x="5676324" y="2765729"/>
+                  </a:lnTo>
+                  <a:lnTo>
+                    <a:pt x="5747946" y="2768213"/>
+                  </a:lnTo>
+                  <a:lnTo>
+                    <a:pt x="5819569" y="2770688"/>
+                  </a:lnTo>
+                  <a:lnTo>
+                    <a:pt x="5891191" y="2773154"/>
+                  </a:lnTo>
+                  <a:lnTo>
+                    <a:pt x="5962814" y="2775612"/>
+                  </a:lnTo>
+                  <a:lnTo>
+                    <a:pt x="6034437" y="2778062"/>
+                  </a:lnTo>
+                  <a:lnTo>
+                    <a:pt x="6106059" y="2780503"/>
+                  </a:lnTo>
+                  <a:lnTo>
+                    <a:pt x="6177682" y="2782935"/>
+                  </a:lnTo>
+                  <a:lnTo>
+                    <a:pt x="6249304" y="2785359"/>
+                  </a:lnTo>
+                  <a:lnTo>
+                    <a:pt x="6320927" y="2787775"/>
+                  </a:lnTo>
+                  <a:lnTo>
+                    <a:pt x="6392549" y="2790183"/>
+                  </a:lnTo>
+                  <a:lnTo>
+                    <a:pt x="6464172" y="2792582"/>
+                  </a:lnTo>
+                  <a:lnTo>
+                    <a:pt x="6535794" y="2794973"/>
+                  </a:lnTo>
+                  <a:lnTo>
+                    <a:pt x="6607417" y="2797355"/>
+                  </a:lnTo>
+                  <a:lnTo>
+                    <a:pt x="6679039" y="2799729"/>
+                  </a:lnTo>
+                  <a:lnTo>
+                    <a:pt x="6750662" y="2802095"/>
                   </a:lnTo>
                 </a:path>
               </a:pathLst>
@@ -3977,309 +3977,309 @@
           </p:nvSpPr>
           <p:spPr>
             <a:xfrm>
-              <a:off x="1172049" y="4602771"/>
-              <a:ext cx="7090630" cy="858167"/>
+              <a:off x="1172049" y="4596649"/>
+              <a:ext cx="7090630" cy="865021"/>
             </a:xfrm>
             <a:custGeom>
               <a:avLst/>
               <a:pathLst>
-                <a:path w="7090630" h="858167">
+                <a:path w="7090630" h="865021">
                   <a:moveTo>
-                    <a:pt x="7090630" y="858167"/>
+                    <a:pt x="7090630" y="865021"/>
                   </a:moveTo>
                   <a:lnTo>
-                    <a:pt x="7019007" y="854435"/>
-                  </a:lnTo>
-                  <a:lnTo>
-                    <a:pt x="6947385" y="850559"/>
-                  </a:lnTo>
-                  <a:lnTo>
-                    <a:pt x="6875762" y="846532"/>
-                  </a:lnTo>
-                  <a:lnTo>
-                    <a:pt x="6804139" y="842350"/>
-                  </a:lnTo>
-                  <a:lnTo>
-                    <a:pt x="6732517" y="838005"/>
-                  </a:lnTo>
-                  <a:lnTo>
-                    <a:pt x="6660894" y="833492"/>
-                  </a:lnTo>
-                  <a:lnTo>
-                    <a:pt x="6589272" y="828804"/>
-                  </a:lnTo>
-                  <a:lnTo>
-                    <a:pt x="6517649" y="823935"/>
-                  </a:lnTo>
-                  <a:lnTo>
-                    <a:pt x="6446027" y="818876"/>
-                  </a:lnTo>
-                  <a:lnTo>
-                    <a:pt x="6374404" y="813622"/>
-                  </a:lnTo>
-                  <a:lnTo>
-                    <a:pt x="6302782" y="808165"/>
-                  </a:lnTo>
-                  <a:lnTo>
-                    <a:pt x="6231159" y="802495"/>
-                  </a:lnTo>
-                  <a:lnTo>
-                    <a:pt x="6159537" y="796606"/>
-                  </a:lnTo>
-                  <a:lnTo>
-                    <a:pt x="6087914" y="790489"/>
-                  </a:lnTo>
-                  <a:lnTo>
-                    <a:pt x="6016292" y="784135"/>
-                  </a:lnTo>
-                  <a:lnTo>
-                    <a:pt x="5944669" y="777535"/>
-                  </a:lnTo>
-                  <a:lnTo>
-                    <a:pt x="5873047" y="770679"/>
-                  </a:lnTo>
-                  <a:lnTo>
-                    <a:pt x="5801424" y="763557"/>
-                  </a:lnTo>
-                  <a:lnTo>
-                    <a:pt x="5729802" y="756159"/>
-                  </a:lnTo>
-                  <a:lnTo>
-                    <a:pt x="5658179" y="748475"/>
-                  </a:lnTo>
-                  <a:lnTo>
-                    <a:pt x="5586557" y="740493"/>
-                  </a:lnTo>
-                  <a:lnTo>
-                    <a:pt x="5514934" y="732202"/>
-                  </a:lnTo>
-                  <a:lnTo>
-                    <a:pt x="5443311" y="723589"/>
-                  </a:lnTo>
-                  <a:lnTo>
-                    <a:pt x="5371689" y="714643"/>
-                  </a:lnTo>
-                  <a:lnTo>
-                    <a:pt x="5300066" y="705350"/>
-                  </a:lnTo>
-                  <a:lnTo>
-                    <a:pt x="5228444" y="695697"/>
-                  </a:lnTo>
-                  <a:lnTo>
-                    <a:pt x="5156821" y="685670"/>
-                  </a:lnTo>
-                  <a:lnTo>
-                    <a:pt x="5085199" y="675254"/>
-                  </a:lnTo>
-                  <a:lnTo>
-                    <a:pt x="5013576" y="664435"/>
-                  </a:lnTo>
-                  <a:lnTo>
-                    <a:pt x="4941954" y="653196"/>
-                  </a:lnTo>
-                  <a:lnTo>
-                    <a:pt x="4870331" y="641523"/>
-                  </a:lnTo>
-                  <a:lnTo>
-                    <a:pt x="4798709" y="629396"/>
-                  </a:lnTo>
-                  <a:lnTo>
-                    <a:pt x="4727086" y="616800"/>
-                  </a:lnTo>
-                  <a:lnTo>
-                    <a:pt x="4655464" y="603716"/>
-                  </a:lnTo>
-                  <a:lnTo>
-                    <a:pt x="4583841" y="590125"/>
-                  </a:lnTo>
-                  <a:lnTo>
-                    <a:pt x="4512219" y="576008"/>
-                  </a:lnTo>
-                  <a:lnTo>
-                    <a:pt x="4440596" y="561343"/>
-                  </a:lnTo>
-                  <a:lnTo>
-                    <a:pt x="4368974" y="546110"/>
-                  </a:lnTo>
-                  <a:lnTo>
-                    <a:pt x="4297351" y="530287"/>
-                  </a:lnTo>
-                  <a:lnTo>
-                    <a:pt x="4225729" y="513851"/>
-                  </a:lnTo>
-                  <a:lnTo>
-                    <a:pt x="4154106" y="496777"/>
-                  </a:lnTo>
-                  <a:lnTo>
-                    <a:pt x="4082483" y="479043"/>
-                  </a:lnTo>
-                  <a:lnTo>
-                    <a:pt x="4010861" y="460621"/>
-                  </a:lnTo>
-                  <a:lnTo>
-                    <a:pt x="3939238" y="441485"/>
-                  </a:lnTo>
-                  <a:lnTo>
-                    <a:pt x="3867616" y="421608"/>
-                  </a:lnTo>
-                  <a:lnTo>
-                    <a:pt x="3795993" y="400961"/>
-                  </a:lnTo>
-                  <a:lnTo>
-                    <a:pt x="3724371" y="379514"/>
-                  </a:lnTo>
-                  <a:lnTo>
-                    <a:pt x="3652748" y="357235"/>
-                  </a:lnTo>
-                  <a:lnTo>
-                    <a:pt x="3581126" y="334094"/>
-                  </a:lnTo>
-                  <a:lnTo>
-                    <a:pt x="3509503" y="310056"/>
-                  </a:lnTo>
-                  <a:lnTo>
-                    <a:pt x="3437881" y="285086"/>
-                  </a:lnTo>
-                  <a:lnTo>
-                    <a:pt x="3366258" y="259149"/>
-                  </a:lnTo>
-                  <a:lnTo>
-                    <a:pt x="3294636" y="232207"/>
-                  </a:lnTo>
-                  <a:lnTo>
-                    <a:pt x="3223013" y="204221"/>
-                  </a:lnTo>
-                  <a:lnTo>
-                    <a:pt x="3151391" y="175151"/>
-                  </a:lnTo>
-                  <a:lnTo>
-                    <a:pt x="3079768" y="144954"/>
-                  </a:lnTo>
-                  <a:lnTo>
-                    <a:pt x="3008146" y="124025"/>
-                  </a:lnTo>
-                  <a:lnTo>
-                    <a:pt x="2936523" y="121268"/>
-                  </a:lnTo>
-                  <a:lnTo>
-                    <a:pt x="2864901" y="118502"/>
-                  </a:lnTo>
-                  <a:lnTo>
-                    <a:pt x="2793278" y="115727"/>
-                  </a:lnTo>
-                  <a:lnTo>
-                    <a:pt x="2721655" y="112942"/>
-                  </a:lnTo>
-                  <a:lnTo>
-                    <a:pt x="2650033" y="110149"/>
-                  </a:lnTo>
-                  <a:lnTo>
-                    <a:pt x="2578410" y="107346"/>
-                  </a:lnTo>
-                  <a:lnTo>
-                    <a:pt x="2506788" y="104534"/>
-                  </a:lnTo>
-                  <a:lnTo>
-                    <a:pt x="2435165" y="101712"/>
-                  </a:lnTo>
-                  <a:lnTo>
-                    <a:pt x="2363543" y="98881"/>
-                  </a:lnTo>
-                  <a:lnTo>
-                    <a:pt x="2291920" y="96041"/>
-                  </a:lnTo>
-                  <a:lnTo>
-                    <a:pt x="2220298" y="93192"/>
-                  </a:lnTo>
-                  <a:lnTo>
-                    <a:pt x="2148675" y="90332"/>
-                  </a:lnTo>
-                  <a:lnTo>
-                    <a:pt x="2077053" y="87464"/>
-                  </a:lnTo>
-                  <a:lnTo>
-                    <a:pt x="2005430" y="84586"/>
-                  </a:lnTo>
-                  <a:lnTo>
-                    <a:pt x="1933808" y="81698"/>
-                  </a:lnTo>
-                  <a:lnTo>
-                    <a:pt x="1862185" y="78801"/>
-                  </a:lnTo>
-                  <a:lnTo>
-                    <a:pt x="1790563" y="75894"/>
-                  </a:lnTo>
-                  <a:lnTo>
-                    <a:pt x="1718940" y="72977"/>
-                  </a:lnTo>
-                  <a:lnTo>
-                    <a:pt x="1647318" y="70051"/>
-                  </a:lnTo>
-                  <a:lnTo>
-                    <a:pt x="1575695" y="67115"/>
-                  </a:lnTo>
-                  <a:lnTo>
-                    <a:pt x="1504073" y="64169"/>
-                  </a:lnTo>
-                  <a:lnTo>
-                    <a:pt x="1432450" y="61214"/>
-                  </a:lnTo>
-                  <a:lnTo>
-                    <a:pt x="1360827" y="58248"/>
-                  </a:lnTo>
-                  <a:lnTo>
-                    <a:pt x="1289205" y="55273"/>
-                  </a:lnTo>
-                  <a:lnTo>
-                    <a:pt x="1217582" y="52288"/>
-                  </a:lnTo>
-                  <a:lnTo>
-                    <a:pt x="1145960" y="49293"/>
-                  </a:lnTo>
-                  <a:lnTo>
-                    <a:pt x="1074337" y="46288"/>
-                  </a:lnTo>
-                  <a:lnTo>
-                    <a:pt x="1002715" y="43274"/>
-                  </a:lnTo>
-                  <a:lnTo>
-                    <a:pt x="931092" y="40249"/>
-                  </a:lnTo>
-                  <a:lnTo>
-                    <a:pt x="859470" y="37214"/>
-                  </a:lnTo>
-                  <a:lnTo>
-                    <a:pt x="787847" y="34169"/>
-                  </a:lnTo>
-                  <a:lnTo>
-                    <a:pt x="716225" y="31114"/>
-                  </a:lnTo>
-                  <a:lnTo>
-                    <a:pt x="644602" y="28048"/>
-                  </a:lnTo>
-                  <a:lnTo>
-                    <a:pt x="572980" y="24973"/>
-                  </a:lnTo>
-                  <a:lnTo>
-                    <a:pt x="501357" y="21887"/>
-                  </a:lnTo>
-                  <a:lnTo>
-                    <a:pt x="429735" y="18792"/>
-                  </a:lnTo>
-                  <a:lnTo>
-                    <a:pt x="358112" y="15685"/>
-                  </a:lnTo>
-                  <a:lnTo>
-                    <a:pt x="286490" y="12569"/>
-                  </a:lnTo>
-                  <a:lnTo>
-                    <a:pt x="214867" y="9442"/>
-                  </a:lnTo>
-                  <a:lnTo>
-                    <a:pt x="143245" y="6305"/>
-                  </a:lnTo>
-                  <a:lnTo>
-                    <a:pt x="71622" y="3158"/>
+                    <a:pt x="7019007" y="861304"/>
+                  </a:lnTo>
+                  <a:lnTo>
+                    <a:pt x="6947385" y="857442"/>
+                  </a:lnTo>
+                  <a:lnTo>
+                    <a:pt x="6875762" y="853431"/>
+                  </a:lnTo>
+                  <a:lnTo>
+                    <a:pt x="6804139" y="849263"/>
+                  </a:lnTo>
+                  <a:lnTo>
+                    <a:pt x="6732517" y="844934"/>
+                  </a:lnTo>
+                  <a:lnTo>
+                    <a:pt x="6660894" y="840436"/>
+                  </a:lnTo>
+                  <a:lnTo>
+                    <a:pt x="6589272" y="835763"/>
+                  </a:lnTo>
+                  <a:lnTo>
+                    <a:pt x="6517649" y="830908"/>
+                  </a:lnTo>
+                  <a:lnTo>
+                    <a:pt x="6446027" y="825865"/>
+                  </a:lnTo>
+                  <a:lnTo>
+                    <a:pt x="6374404" y="820626"/>
+                  </a:lnTo>
+                  <a:lnTo>
+                    <a:pt x="6302782" y="815182"/>
+                  </a:lnTo>
+                  <a:lnTo>
+                    <a:pt x="6231159" y="809528"/>
+                  </a:lnTo>
+                  <a:lnTo>
+                    <a:pt x="6159537" y="803653"/>
+                  </a:lnTo>
+                  <a:lnTo>
+                    <a:pt x="6087914" y="797550"/>
+                  </a:lnTo>
+                  <a:lnTo>
+                    <a:pt x="6016292" y="791209"/>
+                  </a:lnTo>
+                  <a:lnTo>
+                    <a:pt x="5944669" y="784622"/>
+                  </a:lnTo>
+                  <a:lnTo>
+                    <a:pt x="5873047" y="777779"/>
+                  </a:lnTo>
+                  <a:lnTo>
+                    <a:pt x="5801424" y="770669"/>
+                  </a:lnTo>
+                  <a:lnTo>
+                    <a:pt x="5729802" y="763283"/>
+                  </a:lnTo>
+                  <a:lnTo>
+                    <a:pt x="5658179" y="755610"/>
+                  </a:lnTo>
+                  <a:lnTo>
+                    <a:pt x="5586557" y="747639"/>
+                  </a:lnTo>
+                  <a:lnTo>
+                    <a:pt x="5514934" y="739357"/>
+                  </a:lnTo>
+                  <a:lnTo>
+                    <a:pt x="5443311" y="730754"/>
+                  </a:lnTo>
+                  <a:lnTo>
+                    <a:pt x="5371689" y="721816"/>
+                  </a:lnTo>
+                  <a:lnTo>
+                    <a:pt x="5300066" y="712530"/>
+                  </a:lnTo>
+                  <a:lnTo>
+                    <a:pt x="5228444" y="702884"/>
+                  </a:lnTo>
+                  <a:lnTo>
+                    <a:pt x="5156821" y="692862"/>
+                  </a:lnTo>
+                  <a:lnTo>
+                    <a:pt x="5085199" y="682450"/>
+                  </a:lnTo>
+                  <a:lnTo>
+                    <a:pt x="5013576" y="671634"/>
+                  </a:lnTo>
+                  <a:lnTo>
+                    <a:pt x="4941954" y="660397"/>
+                  </a:lnTo>
+                  <a:lnTo>
+                    <a:pt x="4870331" y="648723"/>
+                  </a:lnTo>
+                  <a:lnTo>
+                    <a:pt x="4798709" y="636595"/>
+                  </a:lnTo>
+                  <a:lnTo>
+                    <a:pt x="4727086" y="623995"/>
+                  </a:lnTo>
+                  <a:lnTo>
+                    <a:pt x="4655464" y="610905"/>
+                  </a:lnTo>
+                  <a:lnTo>
+                    <a:pt x="4583841" y="597307"/>
+                  </a:lnTo>
+                  <a:lnTo>
+                    <a:pt x="4512219" y="583179"/>
+                  </a:lnTo>
+                  <a:lnTo>
+                    <a:pt x="4440596" y="568503"/>
+                  </a:lnTo>
+                  <a:lnTo>
+                    <a:pt x="4368974" y="553255"/>
+                  </a:lnTo>
+                  <a:lnTo>
+                    <a:pt x="4297351" y="537415"/>
+                  </a:lnTo>
+                  <a:lnTo>
+                    <a:pt x="4225729" y="520958"/>
+                  </a:lnTo>
+                  <a:lnTo>
+                    <a:pt x="4154106" y="503862"/>
+                  </a:lnTo>
+                  <a:lnTo>
+                    <a:pt x="4082483" y="486101"/>
+                  </a:lnTo>
+                  <a:lnTo>
+                    <a:pt x="4010861" y="467649"/>
+                  </a:lnTo>
+                  <a:lnTo>
+                    <a:pt x="3939238" y="448479"/>
+                  </a:lnTo>
+                  <a:lnTo>
+                    <a:pt x="3867616" y="428564"/>
+                  </a:lnTo>
+                  <a:lnTo>
+                    <a:pt x="3795993" y="407875"/>
+                  </a:lnTo>
+                  <a:lnTo>
+                    <a:pt x="3724371" y="386381"/>
+                  </a:lnTo>
+                  <a:lnTo>
+                    <a:pt x="3652748" y="364052"/>
+                  </a:lnTo>
+                  <a:lnTo>
+                    <a:pt x="3581126" y="340854"/>
+                  </a:lnTo>
+                  <a:lnTo>
+                    <a:pt x="3509503" y="316753"/>
+                  </a:lnTo>
+                  <a:lnTo>
+                    <a:pt x="3437881" y="291716"/>
+                  </a:lnTo>
+                  <a:lnTo>
+                    <a:pt x="3366258" y="265705"/>
+                  </a:lnTo>
+                  <a:lnTo>
+                    <a:pt x="3294636" y="238683"/>
+                  </a:lnTo>
+                  <a:lnTo>
+                    <a:pt x="3223013" y="210610"/>
+                  </a:lnTo>
+                  <a:lnTo>
+                    <a:pt x="3151391" y="181445"/>
+                  </a:lnTo>
+                  <a:lnTo>
+                    <a:pt x="3079768" y="151146"/>
+                  </a:lnTo>
+                  <a:lnTo>
+                    <a:pt x="3008146" y="130102"/>
+                  </a:lnTo>
+                  <a:lnTo>
+                    <a:pt x="2936523" y="127219"/>
+                  </a:lnTo>
+                  <a:lnTo>
+                    <a:pt x="2864901" y="124326"/>
+                  </a:lnTo>
+                  <a:lnTo>
+                    <a:pt x="2793278" y="121423"/>
+                  </a:lnTo>
+                  <a:lnTo>
+                    <a:pt x="2721655" y="118511"/>
+                  </a:lnTo>
+                  <a:lnTo>
+                    <a:pt x="2650033" y="115588"/>
+                  </a:lnTo>
+                  <a:lnTo>
+                    <a:pt x="2578410" y="112655"/>
+                  </a:lnTo>
+                  <a:lnTo>
+                    <a:pt x="2506788" y="109711"/>
+                  </a:lnTo>
+                  <a:lnTo>
+                    <a:pt x="2435165" y="106758"/>
+                  </a:lnTo>
+                  <a:lnTo>
+                    <a:pt x="2363543" y="103794"/>
+                  </a:lnTo>
+                  <a:lnTo>
+                    <a:pt x="2291920" y="100820"/>
+                  </a:lnTo>
+                  <a:lnTo>
+                    <a:pt x="2220298" y="97836"/>
+                  </a:lnTo>
+                  <a:lnTo>
+                    <a:pt x="2148675" y="94841"/>
+                  </a:lnTo>
+                  <a:lnTo>
+                    <a:pt x="2077053" y="91836"/>
+                  </a:lnTo>
+                  <a:lnTo>
+                    <a:pt x="2005430" y="88820"/>
+                  </a:lnTo>
+                  <a:lnTo>
+                    <a:pt x="1933808" y="85794"/>
+                  </a:lnTo>
+                  <a:lnTo>
+                    <a:pt x="1862185" y="82758"/>
+                  </a:lnTo>
+                  <a:lnTo>
+                    <a:pt x="1790563" y="79711"/>
+                  </a:lnTo>
+                  <a:lnTo>
+                    <a:pt x="1718940" y="76653"/>
+                  </a:lnTo>
+                  <a:lnTo>
+                    <a:pt x="1647318" y="73585"/>
+                  </a:lnTo>
+                  <a:lnTo>
+                    <a:pt x="1575695" y="70506"/>
+                  </a:lnTo>
+                  <a:lnTo>
+                    <a:pt x="1504073" y="67416"/>
+                  </a:lnTo>
+                  <a:lnTo>
+                    <a:pt x="1432450" y="64316"/>
+                  </a:lnTo>
+                  <a:lnTo>
+                    <a:pt x="1360827" y="61205"/>
+                  </a:lnTo>
+                  <a:lnTo>
+                    <a:pt x="1289205" y="58083"/>
+                  </a:lnTo>
+                  <a:lnTo>
+                    <a:pt x="1217582" y="54950"/>
+                  </a:lnTo>
+                  <a:lnTo>
+                    <a:pt x="1145960" y="51807"/>
+                  </a:lnTo>
+                  <a:lnTo>
+                    <a:pt x="1074337" y="48652"/>
+                  </a:lnTo>
+                  <a:lnTo>
+                    <a:pt x="1002715" y="45487"/>
+                  </a:lnTo>
+                  <a:lnTo>
+                    <a:pt x="931092" y="42310"/>
+                  </a:lnTo>
+                  <a:lnTo>
+                    <a:pt x="859470" y="39123"/>
+                  </a:lnTo>
+                  <a:lnTo>
+                    <a:pt x="787847" y="35924"/>
+                  </a:lnTo>
+                  <a:lnTo>
+                    <a:pt x="716225" y="32715"/>
+                  </a:lnTo>
+                  <a:lnTo>
+                    <a:pt x="644602" y="29494"/>
+                  </a:lnTo>
+                  <a:lnTo>
+                    <a:pt x="572980" y="26262"/>
+                  </a:lnTo>
+                  <a:lnTo>
+                    <a:pt x="501357" y="23019"/>
+                  </a:lnTo>
+                  <a:lnTo>
+                    <a:pt x="429735" y="19765"/>
+                  </a:lnTo>
+                  <a:lnTo>
+                    <a:pt x="358112" y="16499"/>
+                  </a:lnTo>
+                  <a:lnTo>
+                    <a:pt x="286490" y="13222"/>
+                  </a:lnTo>
+                  <a:lnTo>
+                    <a:pt x="214867" y="9933"/>
+                  </a:lnTo>
+                  <a:lnTo>
+                    <a:pt x="143245" y="6634"/>
+                  </a:lnTo>
+                  <a:lnTo>
+                    <a:pt x="71622" y="3322"/>
                   </a:lnTo>
                   <a:lnTo>
                     <a:pt x="0" y="0"/>
@@ -4302,312 +4302,312 @@
           </p:nvSpPr>
           <p:spPr>
             <a:xfrm>
-              <a:off x="1172049" y="3566756"/>
-              <a:ext cx="7090630" cy="1733172"/>
+              <a:off x="1172049" y="3554684"/>
+              <a:ext cx="7090630" cy="1747316"/>
             </a:xfrm>
             <a:custGeom>
               <a:avLst/>
               <a:pathLst>
-                <a:path w="7090630" h="1733172">
+                <a:path w="7090630" h="1747316">
                   <a:moveTo>
                     <a:pt x="0" y="0"/>
                   </a:moveTo>
                   <a:lnTo>
-                    <a:pt x="71622" y="40711"/>
-                  </a:lnTo>
-                  <a:lnTo>
-                    <a:pt x="143245" y="80589"/>
-                  </a:lnTo>
-                  <a:lnTo>
-                    <a:pt x="214867" y="119652"/>
-                  </a:lnTo>
-                  <a:lnTo>
-                    <a:pt x="286490" y="157915"/>
-                  </a:lnTo>
-                  <a:lnTo>
-                    <a:pt x="358112" y="195397"/>
-                  </a:lnTo>
-                  <a:lnTo>
-                    <a:pt x="429735" y="232111"/>
-                  </a:lnTo>
-                  <a:lnTo>
-                    <a:pt x="501357" y="268075"/>
-                  </a:lnTo>
-                  <a:lnTo>
-                    <a:pt x="572980" y="303303"/>
-                  </a:lnTo>
-                  <a:lnTo>
-                    <a:pt x="644602" y="337811"/>
-                  </a:lnTo>
-                  <a:lnTo>
-                    <a:pt x="716225" y="371612"/>
-                  </a:lnTo>
-                  <a:lnTo>
-                    <a:pt x="787847" y="404723"/>
-                  </a:lnTo>
-                  <a:lnTo>
-                    <a:pt x="859470" y="437156"/>
-                  </a:lnTo>
-                  <a:lnTo>
-                    <a:pt x="931092" y="468926"/>
-                  </a:lnTo>
-                  <a:lnTo>
-                    <a:pt x="1002715" y="500046"/>
-                  </a:lnTo>
-                  <a:lnTo>
-                    <a:pt x="1074337" y="530530"/>
-                  </a:lnTo>
-                  <a:lnTo>
-                    <a:pt x="1145960" y="560390"/>
-                  </a:lnTo>
-                  <a:lnTo>
-                    <a:pt x="1217582" y="589640"/>
-                  </a:lnTo>
-                  <a:lnTo>
-                    <a:pt x="1289205" y="618291"/>
-                  </a:lnTo>
-                  <a:lnTo>
-                    <a:pt x="1360827" y="646356"/>
-                  </a:lnTo>
-                  <a:lnTo>
-                    <a:pt x="1432450" y="673848"/>
-                  </a:lnTo>
-                  <a:lnTo>
-                    <a:pt x="1504073" y="700777"/>
-                  </a:lnTo>
-                  <a:lnTo>
-                    <a:pt x="1575695" y="727155"/>
-                  </a:lnTo>
-                  <a:lnTo>
-                    <a:pt x="1647318" y="752993"/>
-                  </a:lnTo>
-                  <a:lnTo>
-                    <a:pt x="1718940" y="778304"/>
-                  </a:lnTo>
-                  <a:lnTo>
-                    <a:pt x="1790563" y="803096"/>
-                  </a:lnTo>
-                  <a:lnTo>
-                    <a:pt x="1862185" y="827382"/>
-                  </a:lnTo>
-                  <a:lnTo>
-                    <a:pt x="1933808" y="851171"/>
-                  </a:lnTo>
-                  <a:lnTo>
-                    <a:pt x="2005430" y="874473"/>
-                  </a:lnTo>
-                  <a:lnTo>
-                    <a:pt x="2077053" y="897298"/>
-                  </a:lnTo>
-                  <a:lnTo>
-                    <a:pt x="2148675" y="919657"/>
-                  </a:lnTo>
-                  <a:lnTo>
-                    <a:pt x="2220298" y="941559"/>
-                  </a:lnTo>
-                  <a:lnTo>
-                    <a:pt x="2291920" y="963012"/>
-                  </a:lnTo>
-                  <a:lnTo>
-                    <a:pt x="2363543" y="984027"/>
-                  </a:lnTo>
-                  <a:lnTo>
-                    <a:pt x="2435165" y="1004612"/>
-                  </a:lnTo>
-                  <a:lnTo>
-                    <a:pt x="2506788" y="1024776"/>
-                  </a:lnTo>
-                  <a:lnTo>
-                    <a:pt x="2578410" y="1044528"/>
-                  </a:lnTo>
-                  <a:lnTo>
-                    <a:pt x="2650033" y="1063875"/>
-                  </a:lnTo>
-                  <a:lnTo>
-                    <a:pt x="2721655" y="1082827"/>
-                  </a:lnTo>
-                  <a:lnTo>
-                    <a:pt x="2793278" y="1101391"/>
-                  </a:lnTo>
-                  <a:lnTo>
-                    <a:pt x="2864901" y="1119576"/>
-                  </a:lnTo>
-                  <a:lnTo>
-                    <a:pt x="2936523" y="1137388"/>
-                  </a:lnTo>
-                  <a:lnTo>
-                    <a:pt x="3008146" y="1154837"/>
-                  </a:lnTo>
-                  <a:lnTo>
-                    <a:pt x="3079768" y="1171928"/>
-                  </a:lnTo>
-                  <a:lnTo>
-                    <a:pt x="3151391" y="1188670"/>
-                  </a:lnTo>
-                  <a:lnTo>
-                    <a:pt x="3223013" y="1205069"/>
-                  </a:lnTo>
-                  <a:lnTo>
-                    <a:pt x="3294636" y="1221133"/>
-                  </a:lnTo>
-                  <a:lnTo>
-                    <a:pt x="3366258" y="1236869"/>
-                  </a:lnTo>
-                  <a:lnTo>
-                    <a:pt x="3437881" y="1252283"/>
-                  </a:lnTo>
-                  <a:lnTo>
-                    <a:pt x="3509503" y="1267381"/>
-                  </a:lnTo>
-                  <a:lnTo>
-                    <a:pt x="3581126" y="1282171"/>
-                  </a:lnTo>
-                  <a:lnTo>
-                    <a:pt x="3652748" y="1296658"/>
-                  </a:lnTo>
-                  <a:lnTo>
-                    <a:pt x="3724371" y="1310849"/>
-                  </a:lnTo>
-                  <a:lnTo>
-                    <a:pt x="3795993" y="1324749"/>
-                  </a:lnTo>
-                  <a:lnTo>
-                    <a:pt x="3867616" y="1338365"/>
-                  </a:lnTo>
-                  <a:lnTo>
-                    <a:pt x="3939238" y="1351703"/>
-                  </a:lnTo>
-                  <a:lnTo>
-                    <a:pt x="4010861" y="1364768"/>
-                  </a:lnTo>
-                  <a:lnTo>
-                    <a:pt x="4082483" y="1377566"/>
-                  </a:lnTo>
-                  <a:lnTo>
-                    <a:pt x="4154106" y="1390102"/>
-                  </a:lnTo>
-                  <a:lnTo>
-                    <a:pt x="4225729" y="1402382"/>
-                  </a:lnTo>
-                  <a:lnTo>
-                    <a:pt x="4297351" y="1414410"/>
-                  </a:lnTo>
-                  <a:lnTo>
-                    <a:pt x="4368974" y="1426193"/>
-                  </a:lnTo>
-                  <a:lnTo>
-                    <a:pt x="4440596" y="1437734"/>
-                  </a:lnTo>
-                  <a:lnTo>
-                    <a:pt x="4512219" y="1449039"/>
-                  </a:lnTo>
-                  <a:lnTo>
-                    <a:pt x="4583841" y="1460114"/>
-                  </a:lnTo>
-                  <a:lnTo>
-                    <a:pt x="4655464" y="1470961"/>
-                  </a:lnTo>
-                  <a:lnTo>
-                    <a:pt x="4727086" y="1481587"/>
-                  </a:lnTo>
-                  <a:lnTo>
-                    <a:pt x="4798709" y="1491996"/>
-                  </a:lnTo>
-                  <a:lnTo>
-                    <a:pt x="4870331" y="1502191"/>
-                  </a:lnTo>
-                  <a:lnTo>
-                    <a:pt x="4941954" y="1512178"/>
-                  </a:lnTo>
-                  <a:lnTo>
-                    <a:pt x="5013576" y="1521961"/>
-                  </a:lnTo>
-                  <a:lnTo>
-                    <a:pt x="5085199" y="1531544"/>
-                  </a:lnTo>
-                  <a:lnTo>
-                    <a:pt x="5156821" y="1540931"/>
-                  </a:lnTo>
-                  <a:lnTo>
-                    <a:pt x="5228444" y="1550125"/>
-                  </a:lnTo>
-                  <a:lnTo>
-                    <a:pt x="5300066" y="1559132"/>
-                  </a:lnTo>
-                  <a:lnTo>
-                    <a:pt x="5371689" y="1567955"/>
-                  </a:lnTo>
-                  <a:lnTo>
-                    <a:pt x="5443311" y="1576597"/>
-                  </a:lnTo>
-                  <a:lnTo>
-                    <a:pt x="5514934" y="1585062"/>
-                  </a:lnTo>
-                  <a:lnTo>
-                    <a:pt x="5586557" y="1593354"/>
-                  </a:lnTo>
-                  <a:lnTo>
-                    <a:pt x="5658179" y="1601477"/>
-                  </a:lnTo>
-                  <a:lnTo>
-                    <a:pt x="5729802" y="1609433"/>
-                  </a:lnTo>
-                  <a:lnTo>
-                    <a:pt x="5801424" y="1617227"/>
-                  </a:lnTo>
-                  <a:lnTo>
-                    <a:pt x="5873047" y="1624861"/>
-                  </a:lnTo>
-                  <a:lnTo>
-                    <a:pt x="5944669" y="1632339"/>
-                  </a:lnTo>
-                  <a:lnTo>
-                    <a:pt x="6016292" y="1639665"/>
-                  </a:lnTo>
-                  <a:lnTo>
-                    <a:pt x="6087914" y="1646840"/>
-                  </a:lnTo>
-                  <a:lnTo>
-                    <a:pt x="6159537" y="1653869"/>
-                  </a:lnTo>
-                  <a:lnTo>
-                    <a:pt x="6231159" y="1660754"/>
-                  </a:lnTo>
-                  <a:lnTo>
-                    <a:pt x="6302782" y="1667498"/>
-                  </a:lnTo>
-                  <a:lnTo>
-                    <a:pt x="6374404" y="1674104"/>
-                  </a:lnTo>
-                  <a:lnTo>
-                    <a:pt x="6446027" y="1680575"/>
-                  </a:lnTo>
-                  <a:lnTo>
-                    <a:pt x="6517649" y="1686913"/>
-                  </a:lnTo>
-                  <a:lnTo>
-                    <a:pt x="6589272" y="1693122"/>
-                  </a:lnTo>
-                  <a:lnTo>
-                    <a:pt x="6660894" y="1699204"/>
-                  </a:lnTo>
-                  <a:lnTo>
-                    <a:pt x="6732517" y="1705162"/>
-                  </a:lnTo>
-                  <a:lnTo>
-                    <a:pt x="6804139" y="1710998"/>
-                  </a:lnTo>
-                  <a:lnTo>
-                    <a:pt x="6875762" y="1716714"/>
-                  </a:lnTo>
-                  <a:lnTo>
-                    <a:pt x="6947385" y="1722314"/>
-                  </a:lnTo>
-                  <a:lnTo>
-                    <a:pt x="7019007" y="1727799"/>
-                  </a:lnTo>
-                  <a:lnTo>
-                    <a:pt x="7090630" y="1733172"/>
+                    <a:pt x="71622" y="41237"/>
+                  </a:lnTo>
+                  <a:lnTo>
+                    <a:pt x="143245" y="81626"/>
+                  </a:lnTo>
+                  <a:lnTo>
+                    <a:pt x="214867" y="121183"/>
+                  </a:lnTo>
+                  <a:lnTo>
+                    <a:pt x="286490" y="159926"/>
+                  </a:lnTo>
+                  <a:lnTo>
+                    <a:pt x="358112" y="197870"/>
+                  </a:lnTo>
+                  <a:lnTo>
+                    <a:pt x="429735" y="235033"/>
+                  </a:lnTo>
+                  <a:lnTo>
+                    <a:pt x="501357" y="271431"/>
+                  </a:lnTo>
+                  <a:lnTo>
+                    <a:pt x="572980" y="307080"/>
+                  </a:lnTo>
+                  <a:lnTo>
+                    <a:pt x="644602" y="341994"/>
+                  </a:lnTo>
+                  <a:lnTo>
+                    <a:pt x="716225" y="376190"/>
+                  </a:lnTo>
+                  <a:lnTo>
+                    <a:pt x="787847" y="409681"/>
+                  </a:lnTo>
+                  <a:lnTo>
+                    <a:pt x="859470" y="442482"/>
+                  </a:lnTo>
+                  <a:lnTo>
+                    <a:pt x="931092" y="474608"/>
+                  </a:lnTo>
+                  <a:lnTo>
+                    <a:pt x="1002715" y="506073"/>
+                  </a:lnTo>
+                  <a:lnTo>
+                    <a:pt x="1074337" y="536890"/>
+                  </a:lnTo>
+                  <a:lnTo>
+                    <a:pt x="1145960" y="567072"/>
+                  </a:lnTo>
+                  <a:lnTo>
+                    <a:pt x="1217582" y="596632"/>
+                  </a:lnTo>
+                  <a:lnTo>
+                    <a:pt x="1289205" y="625584"/>
+                  </a:lnTo>
+                  <a:lnTo>
+                    <a:pt x="1360827" y="653939"/>
+                  </a:lnTo>
+                  <a:lnTo>
+                    <a:pt x="1432450" y="681711"/>
+                  </a:lnTo>
+                  <a:lnTo>
+                    <a:pt x="1504073" y="708911"/>
+                  </a:lnTo>
+                  <a:lnTo>
+                    <a:pt x="1575695" y="735550"/>
+                  </a:lnTo>
+                  <a:lnTo>
+                    <a:pt x="1647318" y="761641"/>
+                  </a:lnTo>
+                  <a:lnTo>
+                    <a:pt x="1718940" y="787195"/>
+                  </a:lnTo>
+                  <a:lnTo>
+                    <a:pt x="1790563" y="812223"/>
+                  </a:lnTo>
+                  <a:lnTo>
+                    <a:pt x="1862185" y="836735"/>
+                  </a:lnTo>
+                  <a:lnTo>
+                    <a:pt x="1933808" y="860742"/>
+                  </a:lnTo>
+                  <a:lnTo>
+                    <a:pt x="2005430" y="884255"/>
+                  </a:lnTo>
+                  <a:lnTo>
+                    <a:pt x="2077053" y="907284"/>
+                  </a:lnTo>
+                  <a:lnTo>
+                    <a:pt x="2148675" y="929839"/>
+                  </a:lnTo>
+                  <a:lnTo>
+                    <a:pt x="2220298" y="951929"/>
+                  </a:lnTo>
+                  <a:lnTo>
+                    <a:pt x="2291920" y="973564"/>
+                  </a:lnTo>
+                  <a:lnTo>
+                    <a:pt x="2363543" y="994754"/>
+                  </a:lnTo>
+                  <a:lnTo>
+                    <a:pt x="2435165" y="1015507"/>
+                  </a:lnTo>
+                  <a:lnTo>
+                    <a:pt x="2506788" y="1035833"/>
+                  </a:lnTo>
+                  <a:lnTo>
+                    <a:pt x="2578410" y="1055741"/>
+                  </a:lnTo>
+                  <a:lnTo>
+                    <a:pt x="2650033" y="1075238"/>
+                  </a:lnTo>
+                  <a:lnTo>
+                    <a:pt x="2721655" y="1094334"/>
+                  </a:lnTo>
+                  <a:lnTo>
+                    <a:pt x="2793278" y="1113037"/>
+                  </a:lnTo>
+                  <a:lnTo>
+                    <a:pt x="2864901" y="1131355"/>
+                  </a:lnTo>
+                  <a:lnTo>
+                    <a:pt x="2936523" y="1149295"/>
+                  </a:lnTo>
+                  <a:lnTo>
+                    <a:pt x="3008146" y="1166866"/>
+                  </a:lnTo>
+                  <a:lnTo>
+                    <a:pt x="3079768" y="1184075"/>
+                  </a:lnTo>
+                  <a:lnTo>
+                    <a:pt x="3151391" y="1200930"/>
+                  </a:lnTo>
+                  <a:lnTo>
+                    <a:pt x="3223013" y="1217438"/>
+                  </a:lnTo>
+                  <a:lnTo>
+                    <a:pt x="3294636" y="1233606"/>
+                  </a:lnTo>
+                  <a:lnTo>
+                    <a:pt x="3366258" y="1249441"/>
+                  </a:lnTo>
+                  <a:lnTo>
+                    <a:pt x="3437881" y="1264949"/>
+                  </a:lnTo>
+                  <a:lnTo>
+                    <a:pt x="3509503" y="1280139"/>
+                  </a:lnTo>
+                  <a:lnTo>
+                    <a:pt x="3581126" y="1295015"/>
+                  </a:lnTo>
+                  <a:lnTo>
+                    <a:pt x="3652748" y="1309586"/>
+                  </a:lnTo>
+                  <a:lnTo>
+                    <a:pt x="3724371" y="1323856"/>
+                  </a:lnTo>
+                  <a:lnTo>
+                    <a:pt x="3795993" y="1337832"/>
+                  </a:lnTo>
+                  <a:lnTo>
+                    <a:pt x="3867616" y="1351521"/>
+                  </a:lnTo>
+                  <a:lnTo>
+                    <a:pt x="3939238" y="1364927"/>
+                  </a:lnTo>
+                  <a:lnTo>
+                    <a:pt x="4010861" y="1378058"/>
+                  </a:lnTo>
+                  <a:lnTo>
+                    <a:pt x="4082483" y="1390918"/>
+                  </a:lnTo>
+                  <a:lnTo>
+                    <a:pt x="4154106" y="1403513"/>
+                  </a:lnTo>
+                  <a:lnTo>
+                    <a:pt x="4225729" y="1415849"/>
+                  </a:lnTo>
+                  <a:lnTo>
+                    <a:pt x="4297351" y="1427931"/>
+                  </a:lnTo>
+                  <a:lnTo>
+                    <a:pt x="4368974" y="1439765"/>
+                  </a:lnTo>
+                  <a:lnTo>
+                    <a:pt x="4440596" y="1451354"/>
+                  </a:lnTo>
+                  <a:lnTo>
+                    <a:pt x="4512219" y="1462705"/>
+                  </a:lnTo>
+                  <a:lnTo>
+                    <a:pt x="4583841" y="1473822"/>
+                  </a:lnTo>
+                  <a:lnTo>
+                    <a:pt x="4655464" y="1484710"/>
+                  </a:lnTo>
+                  <a:lnTo>
+                    <a:pt x="4727086" y="1495374"/>
+                  </a:lnTo>
+                  <a:lnTo>
+                    <a:pt x="4798709" y="1505819"/>
+                  </a:lnTo>
+                  <a:lnTo>
+                    <a:pt x="4870331" y="1516048"/>
+                  </a:lnTo>
+                  <a:lnTo>
+                    <a:pt x="4941954" y="1526066"/>
+                  </a:lnTo>
+                  <a:lnTo>
+                    <a:pt x="5013576" y="1535879"/>
+                  </a:lnTo>
+                  <a:lnTo>
+                    <a:pt x="5085199" y="1545489"/>
+                  </a:lnTo>
+                  <a:lnTo>
+                    <a:pt x="5156821" y="1554901"/>
+                  </a:lnTo>
+                  <a:lnTo>
+                    <a:pt x="5228444" y="1564120"/>
+                  </a:lnTo>
+                  <a:lnTo>
+                    <a:pt x="5300066" y="1573149"/>
+                  </a:lnTo>
+                  <a:lnTo>
+                    <a:pt x="5371689" y="1581991"/>
+                  </a:lnTo>
+                  <a:lnTo>
+                    <a:pt x="5443311" y="1590652"/>
+                  </a:lnTo>
+                  <a:lnTo>
+                    <a:pt x="5514934" y="1599134"/>
+                  </a:lnTo>
+                  <a:lnTo>
+                    <a:pt x="5586557" y="1607442"/>
+                  </a:lnTo>
+                  <a:lnTo>
+                    <a:pt x="5658179" y="1615579"/>
+                  </a:lnTo>
+                  <a:lnTo>
+                    <a:pt x="5729802" y="1623548"/>
+                  </a:lnTo>
+                  <a:lnTo>
+                    <a:pt x="5801424" y="1631353"/>
+                  </a:lnTo>
+                  <a:lnTo>
+                    <a:pt x="5873047" y="1638997"/>
+                  </a:lnTo>
+                  <a:lnTo>
+                    <a:pt x="5944669" y="1646484"/>
+                  </a:lnTo>
+                  <a:lnTo>
+                    <a:pt x="6016292" y="1653816"/>
+                  </a:lnTo>
+                  <a:lnTo>
+                    <a:pt x="6087914" y="1660998"/>
+                  </a:lnTo>
+                  <a:lnTo>
+                    <a:pt x="6159537" y="1668032"/>
+                  </a:lnTo>
+                  <a:lnTo>
+                    <a:pt x="6231159" y="1674921"/>
+                  </a:lnTo>
+                  <a:lnTo>
+                    <a:pt x="6302782" y="1681668"/>
+                  </a:lnTo>
+                  <a:lnTo>
+                    <a:pt x="6374404" y="1688276"/>
+                  </a:lnTo>
+                  <a:lnTo>
+                    <a:pt x="6446027" y="1694748"/>
+                  </a:lnTo>
+                  <a:lnTo>
+                    <a:pt x="6517649" y="1701086"/>
+                  </a:lnTo>
+                  <a:lnTo>
+                    <a:pt x="6589272" y="1707295"/>
+                  </a:lnTo>
+                  <a:lnTo>
+                    <a:pt x="6660894" y="1713375"/>
+                  </a:lnTo>
+                  <a:lnTo>
+                    <a:pt x="6732517" y="1719330"/>
+                  </a:lnTo>
+                  <a:lnTo>
+                    <a:pt x="6804139" y="1725163"/>
+                  </a:lnTo>
+                  <a:lnTo>
+                    <a:pt x="6875762" y="1730875"/>
+                  </a:lnTo>
+                  <a:lnTo>
+                    <a:pt x="6947385" y="1736470"/>
+                  </a:lnTo>
+                  <a:lnTo>
+                    <a:pt x="7019007" y="1741950"/>
+                  </a:lnTo>
+                  <a:lnTo>
+                    <a:pt x="7090630" y="1747316"/>
                   </a:lnTo>
                 </a:path>
               </a:pathLst>
@@ -5347,7 +5347,7 @@
                   <a:latin typeface="Helvetica"/>
                   <a:cs typeface="Helvetica"/>
                 </a:rPr>
-                <a:t>subHR per 10 % decline: 1.29 (1.04-1.59), p_Bonf = 0.117 (n = 6)  |  per IQR decline (Δ = 27.5 %): 2.00 (1.12-3.58)  |  IQR: [-29.1, -1.6] %</a:t>
+                <a:t>subHR per 10 % decline: 1.29 (1.04-1.59), p_Bonf = 0.112 (n = 6)  |  per IQR decline (Δ = 27.5 %): 2.01 (1.12-3.60)  |  IQR: [-29.1, -1.6] %</a:t>
               </a:r>
             </a:p>
           </p:txBody>
